--- a/slides/datasets-in-10-minutes-eprstmt.pptx
+++ b/slides/datasets-in-10-minutes-eprstmt.pptx
@@ -13614,11 +13614,11 @@
         <p:spPr>
           <a:xfrm>
             <a:off x="548640" y="2484835"/>
-            <a:ext cx="8046720" cy="585216"/>
-          </a:xfrm>
-        </p:spPr>
-        <p:txBody>
-          <a:bodyPr wrap="square" lIns="0" rIns="0" tIns="0" bIns="0" anchor="ctr">
+            <a:ext cx="8046720" cy="686816"/>
+          </a:xfrm>
+        </p:spPr>
+        <p:txBody>
+          <a:bodyPr wrap="square" lIns="0" rIns="0" tIns="0" bIns="101600" anchor="ctr">
             <a:noAutofit/>
           </a:bodyPr>
           <a:lstStyle/>

--- a/slides/datasets-in-10-minutes-eprstmt.pptx
+++ b/slides/datasets-in-10-minutes-eprstmt.pptx
@@ -25,7 +25,6 @@
     <p:sldId id="273" r:id="rId23"/>
     <p:sldId id="274" r:id="rId24"/>
     <p:sldId id="275" r:id="rId25"/>
-    <p:sldId id="276" r:id="rId26"/>
     <p:sldId id="277" r:id="rId27"/>
     <p:sldId id="278" r:id="rId28"/>
     <p:sldId id="279" r:id="rId29"/>
@@ -45,7 +44,6 @@
     <p:sldId id="293" r:id="rId43"/>
     <p:sldId id="294" r:id="rId44"/>
     <p:sldId id="295" r:id="rId45"/>
-    <p:sldId id="296" r:id="rId46"/>
   </p:sldIdLst>
   <p:sldSz cx="9144000" cy="5143500" type="screen16x9"/>
   <p:notesSz cx="6858000" cy="9144000"/>
@@ -11678,7 +11676,7 @@
                 <a:ea typeface="Noto Sans CJK JP"/>
                 <a:cs typeface="Noto Sans"/>
               </a:rPr>
-              <a:t>CLEVAでの利用と入手方法</a:t>
+              <a:t>入手方法と利用条件</a:t>
             </a:r>
           </a:p>
         </p:txBody>
@@ -11726,7 +11724,7 @@
                 <a:ea typeface="Noto Sans CJK JP"/>
                 <a:cs typeface="Noto Sans"/>
               </a:rPr>
-              <a:t>4. CLEVAでの利用と入手方法</a:t>
+              <a:t>4. 入手方法と利用条件</a:t>
             </a:r>
           </a:p>
         </p:txBody>
@@ -11792,14 +11790,97 @@
                 <a:ea typeface="Noto Sans CJK JP"/>
                 <a:cs typeface="Noto Sans"/>
               </a:rPr>
-              <a:t>CLEVAでは、二つの選択肢から答える</a:t>
-            </a:r>
-          </a:p>
-        </p:txBody>
-      </p:sp>
-      <p:sp>
-        <p:nvSpPr>
-          <p:cNvPr id="3" name="Title 2"/>
+              <a:t>公式配布先と、利用条件</a:t>
+            </a:r>
+          </a:p>
+        </p:txBody>
+      </p:sp>
+      <p:sp>
+        <p:nvSpPr>
+          <p:cNvPr id="3" name="Text Placeholder 2"/>
+          <p:cNvSpPr>
+            <a:spLocks noGrp="1"/>
+          </p:cNvSpPr>
+          <p:nvPr>
+            <p:ph type="body" idx="1"/>
+          </p:nvPr>
+        </p:nvSpPr>
+        <p:spPr>
+          <a:xfrm>
+            <a:off x="594360" y="1463040"/>
+            <a:ext cx="7955279" cy="3044952"/>
+          </a:xfrm>
+        </p:spPr>
+        <p:txBody>
+          <a:bodyPr wrap="square" tIns="91440" bIns="91440">
+            <a:noAutofit/>
+          </a:bodyPr>
+          <a:lstStyle/>
+          <a:p>
+            <a:pPr marL="457200" indent="-355600">
+              <a:lnSpc>
+                <a:spcPts val="2379"/>
+              </a:lnSpc>
+              <a:spcAft>
+                <a:spcPts val="700"/>
+              </a:spcAft>
+              <a:buSzPct val="66500"/>
+              <a:buFont typeface="Noto Sans CJK JP"/>
+              <a:buChar char="●"/>
+              <a:defRPr sz="2000" b="0">
+                <a:solidFill>
+                  <a:srgbClr val="303437"/>
+                </a:solidFill>
+                <a:latin typeface="Noto Sans"/>
+              </a:defRPr>
+            </a:pPr>
+            <a:r>
+              <a:rPr sz="2000" b="0" lang="ja-JP" altLang="en-US">
+                <a:solidFill>
+                  <a:srgbClr val="303437"/>
+                </a:solidFill>
+                <a:latin typeface="Noto Sans"/>
+                <a:ea typeface="Noto Sans CJK JP"/>
+                <a:cs typeface="Noto Sans"/>
+              </a:rPr>
+              <a:t>FewCLUEの公式リポジトリから、EPRSTMTの学習用・開発用・テスト用データを入手できる。</a:t>
+            </a:r>
+          </a:p>
+          <a:p>
+            <a:pPr marL="457200" indent="-355600">
+              <a:lnSpc>
+                <a:spcPts val="2379"/>
+              </a:lnSpc>
+              <a:spcAft>
+                <a:spcPts val="700"/>
+              </a:spcAft>
+              <a:buSzPct val="66500"/>
+              <a:buFont typeface="Noto Sans CJK JP"/>
+              <a:buChar char="●"/>
+              <a:defRPr sz="2000" b="0">
+                <a:solidFill>
+                  <a:srgbClr val="303437"/>
+                </a:solidFill>
+                <a:latin typeface="Noto Sans"/>
+              </a:defRPr>
+            </a:pPr>
+            <a:r>
+              <a:rPr sz="2000" b="0" lang="ja-JP" altLang="en-US">
+                <a:solidFill>
+                  <a:srgbClr val="303437"/>
+                </a:solidFill>
+                <a:latin typeface="Noto Sans"/>
+                <a:ea typeface="Noto Sans CJK JP"/>
+                <a:cs typeface="Noto Sans"/>
+              </a:rPr>
+              <a:t>付属するBERTコードにはApache 2.0が適用される。一方、商品レビュー本文を含むデータ全体の利用条件は明示されていないため、再利用の条件は配布元への確認が必要。</a:t>
+            </a:r>
+          </a:p>
+        </p:txBody>
+      </p:sp>
+      <p:sp>
+        <p:nvSpPr>
+          <p:cNvPr id="4" name="Title 3"/>
           <p:cNvSpPr>
             <a:spLocks noGrp="1"/>
           </p:cNvSpPr>
@@ -11840,21 +11921,21 @@
                 <a:ea typeface="Noto Sans CJK JP"/>
                 <a:cs typeface="Noto Sans"/>
               </a:rPr>
-              <a:t>4. CLEVAでの利用と入手方法</a:t>
-            </a:r>
-          </a:p>
-        </p:txBody>
-      </p:sp>
-      <p:sp>
-        <p:nvSpPr>
-          <p:cNvPr id="4" name="TextBox 3"/>
+              <a:t>4. 入手方法と利用条件</a:t>
+            </a:r>
+          </a:p>
+        </p:txBody>
+      </p:sp>
+      <p:sp>
+        <p:nvSpPr>
+          <p:cNvPr id="5" name="sources"/>
           <p:cNvSpPr txBox="1"/>
           <p:nvPr/>
         </p:nvSpPr>
         <p:spPr>
           <a:xfrm>
-            <a:off x="548640" y="1417320"/>
-            <a:ext cx="3840480" cy="228600"/>
+            <a:off x="502920" y="4700016"/>
+            <a:ext cx="8183879" cy="530352"/>
           </a:xfrm>
           <a:prstGeom prst="rect">
             <a:avLst/>
@@ -11869,24 +11950,24 @@
           <a:p>
             <a:pPr algn="l">
               <a:lnSpc>
-                <a:spcPts val="1404"/>
-              </a:lnSpc>
-              <a:spcBef>
-                <a:spcPts val="0"/>
-              </a:spcBef>
-              <a:spcAft>
-                <a:spcPts val="0"/>
-              </a:spcAft>
-              <a:buNone/>
-              <a:defRPr sz="1200" b="0">
-                <a:solidFill>
-                  <a:srgbClr val="303437"/>
-                </a:solidFill>
-                <a:latin typeface="Noto Sans"/>
-              </a:defRPr>
-            </a:pPr>
-            <a:r>
-              <a:rPr sz="1200" b="0" lang="ja-JP" altLang="en-US">
+                <a:spcPts val="940"/>
+              </a:lnSpc>
+              <a:spcBef>
+                <a:spcPts val="0"/>
+              </a:spcBef>
+              <a:spcAft>
+                <a:spcPts val="140"/>
+              </a:spcAft>
+              <a:buNone/>
+              <a:defRPr sz="810" b="0">
+                <a:solidFill>
+                  <a:srgbClr val="303437"/>
+                </a:solidFill>
+                <a:latin typeface="Noto Sans"/>
+              </a:defRPr>
+            </a:pPr>
+            <a:r>
+              <a:rPr sz="810" b="0" lang="ja-JP" altLang="en-US">
                 <a:solidFill>
                   <a:srgbClr val="626669"/>
                 </a:solidFill>
@@ -11894,53 +11975,10 @@
                 <a:ea typeface="Noto Sans CJK JP"/>
                 <a:cs typeface="Noto Sans"/>
               </a:rPr>
-              <a:t>公開されている中国語の設問</a:t>
-            </a:r>
-          </a:p>
-        </p:txBody>
-      </p:sp>
-      <p:sp>
-        <p:nvSpPr>
-          <p:cNvPr id="5" name="TextBox 4"/>
-          <p:cNvSpPr txBox="1"/>
-          <p:nvPr/>
-        </p:nvSpPr>
-        <p:spPr>
-          <a:xfrm>
-            <a:off x="4617720" y="1417320"/>
-            <a:ext cx="3931920" cy="228600"/>
-          </a:xfrm>
-          <a:prstGeom prst="rect">
-            <a:avLst/>
-          </a:prstGeom>
-          <a:noFill/>
-        </p:spPr>
-        <p:txBody>
-          <a:bodyPr wrap="square" lIns="0" rIns="0" tIns="0" bIns="0">
-            <a:noAutofit/>
-          </a:bodyPr>
-          <a:lstStyle/>
-          <a:p>
-            <a:pPr algn="l">
-              <a:lnSpc>
-                <a:spcPts val="1404"/>
-              </a:lnSpc>
-              <a:spcBef>
-                <a:spcPts val="0"/>
-              </a:spcBef>
-              <a:spcAft>
-                <a:spcPts val="0"/>
-              </a:spcAft>
-              <a:buNone/>
-              <a:defRPr sz="1200" b="0">
-                <a:solidFill>
-                  <a:srgbClr val="303437"/>
-                </a:solidFill>
-                <a:latin typeface="Noto Sans"/>
-              </a:defRPr>
-            </a:pPr>
-            <a:r>
-              <a:rPr sz="1200" b="0" lang="ja-JP" altLang="en-US">
+              <a:t>[1] CLUE team (n.d.). FewCLUE: 小样本学习测评基准. GitHub.</a:t>
+            </a:r>
+            <a:r>
+              <a:rPr sz="810" b="0" lang="ja-JP" altLang="en-US">
                 <a:solidFill>
                   <a:srgbClr val="626669"/>
                 </a:solidFill>
@@ -11948,501 +11986,8 @@
                 <a:ea typeface="Noto Sans CJK JP"/>
                 <a:cs typeface="Noto Sans"/>
               </a:rPr>
-              <a:t>日本語訳</a:t>
-            </a:r>
-          </a:p>
-        </p:txBody>
-      </p:sp>
-      <p:sp>
-        <p:nvSpPr>
-          <p:cNvPr id="6" name="quote-frame"/>
-          <p:cNvSpPr/>
-          <p:nvPr/>
-        </p:nvSpPr>
-        <p:spPr>
-          <a:xfrm>
-            <a:off x="548640" y="1664208"/>
-            <a:ext cx="3840480" cy="1430866"/>
-          </a:xfrm>
-          <a:prstGeom prst="rect">
-            <a:avLst/>
-          </a:prstGeom>
-          <a:solidFill>
-            <a:srgbClr val="EBEDEB"/>
-          </a:solidFill>
-          <a:ln>
-            <a:noFill/>
-          </a:ln>
-          <a:effectLst/>
-        </p:spPr>
-        <p:style>
-          <a:lnRef idx="1">
-            <a:schemeClr val="accent1"/>
-          </a:lnRef>
-          <a:fillRef idx="3">
-            <a:schemeClr val="accent1"/>
-          </a:fillRef>
-          <a:effectRef idx="0">
-            <a:schemeClr val="accent1"/>
-          </a:effectRef>
-          <a:fontRef idx="minor">
-            <a:schemeClr val="lt1"/>
-          </a:fontRef>
-        </p:style>
-        <p:txBody>
-          <a:bodyPr rtlCol="0" anchor="t" wrap="square" lIns="177800" rIns="177800" tIns="68241" bIns="127000">
-            <a:noAutofit/>
-          </a:bodyPr>
-          <a:lstStyle/>
-          <a:p>
-            <a:pPr algn="l">
-              <a:lnSpc>
-                <a:spcPts val="2023"/>
-              </a:lnSpc>
-              <a:spcBef>
-                <a:spcPts val="0"/>
-              </a:spcBef>
-              <a:spcAft>
-                <a:spcPts val="0"/>
-              </a:spcAft>
-              <a:buNone/>
-              <a:defRPr sz="1700" b="0">
-                <a:solidFill>
-                  <a:srgbClr val="303437"/>
-                </a:solidFill>
-                <a:latin typeface="Noto Sans"/>
-              </a:defRPr>
-            </a:pPr>
-            <a:r>
-              <a:rPr sz="1700" b="0" lang="ja-JP" altLang="en-US">
-                <a:solidFill>
-                  <a:srgbClr val="303437"/>
-                </a:solidFill>
-                <a:latin typeface="Noto Sans"/>
-                <a:ea typeface="Noto Sans CJK JP"/>
-                <a:cs typeface="Noto Sans"/>
-              </a:rPr>
-              <a:t>这个产品评价是正面还是负面的？</a:t>
-            </a:r>
-          </a:p>
-          <a:p>
-            <a:pPr algn="l">
-              <a:lnSpc>
-                <a:spcPts val="2023"/>
-              </a:lnSpc>
-              <a:spcBef>
-                <a:spcPts val="0"/>
-              </a:spcBef>
-              <a:spcAft>
-                <a:spcPts val="0"/>
-              </a:spcAft>
-              <a:buNone/>
-              <a:defRPr sz="1700" b="0">
-                <a:solidFill>
-                  <a:srgbClr val="303437"/>
-                </a:solidFill>
-                <a:latin typeface="Noto Sans"/>
-              </a:defRPr>
-            </a:pPr>
-            <a:r>
-              <a:rPr sz="1700" b="0" lang="ja-JP" altLang="en-US">
-                <a:solidFill>
-                  <a:srgbClr val="303437"/>
-                </a:solidFill>
-                <a:latin typeface="Noto Sans"/>
-                <a:ea typeface="Noto Sans CJK JP"/>
-                <a:cs typeface="Noto Sans"/>
-              </a:rPr>
-              <a:t>评价：商城就是快好省，快好省</a:t>
-            </a:r>
-          </a:p>
-          <a:p>
-            <a:pPr algn="l">
-              <a:lnSpc>
-                <a:spcPts val="2023"/>
-              </a:lnSpc>
-              <a:spcBef>
-                <a:spcPts val="0"/>
-              </a:spcBef>
-              <a:spcAft>
-                <a:spcPts val="0"/>
-              </a:spcAft>
-              <a:buNone/>
-              <a:defRPr sz="1700" b="0">
-                <a:solidFill>
-                  <a:srgbClr val="303437"/>
-                </a:solidFill>
-                <a:latin typeface="Noto Sans"/>
-              </a:defRPr>
-            </a:pPr>
-            <a:r>
-              <a:rPr sz="1700" b="0" lang="ja-JP" altLang="en-US">
-                <a:solidFill>
-                  <a:srgbClr val="303437"/>
-                </a:solidFill>
-                <a:latin typeface="Noto Sans"/>
-                <a:ea typeface="Noto Sans CJK JP"/>
-                <a:cs typeface="Noto Sans"/>
-              </a:rPr>
-              <a:t>A. 负面</a:t>
-            </a:r>
-          </a:p>
-          <a:p>
-            <a:pPr algn="l">
-              <a:lnSpc>
-                <a:spcPts val="2023"/>
-              </a:lnSpc>
-              <a:spcBef>
-                <a:spcPts val="0"/>
-              </a:spcBef>
-              <a:spcAft>
-                <a:spcPts val="0"/>
-              </a:spcAft>
-              <a:buNone/>
-              <a:defRPr sz="1700" b="0">
-                <a:solidFill>
-                  <a:srgbClr val="303437"/>
-                </a:solidFill>
-                <a:latin typeface="Noto Sans"/>
-              </a:defRPr>
-            </a:pPr>
-            <a:r>
-              <a:rPr sz="1700" b="0" lang="ja-JP" altLang="en-US">
-                <a:solidFill>
-                  <a:srgbClr val="303437"/>
-                </a:solidFill>
-                <a:latin typeface="Noto Sans"/>
-                <a:ea typeface="Noto Sans CJK JP"/>
-                <a:cs typeface="Noto Sans"/>
-              </a:rPr>
-              <a:t>B. 正面</a:t>
-            </a:r>
-          </a:p>
-          <a:p>
-            <a:pPr algn="l">
-              <a:lnSpc>
-                <a:spcPts val="2023"/>
-              </a:lnSpc>
-              <a:spcBef>
-                <a:spcPts val="0"/>
-              </a:spcBef>
-              <a:spcAft>
-                <a:spcPts val="0"/>
-              </a:spcAft>
-              <a:buNone/>
-              <a:defRPr sz="1700" b="0">
-                <a:solidFill>
-                  <a:srgbClr val="303437"/>
-                </a:solidFill>
-                <a:latin typeface="Noto Sans"/>
-              </a:defRPr>
-            </a:pPr>
-            <a:r>
-              <a:rPr sz="1700" b="0" lang="ja-JP" altLang="en-US">
-                <a:solidFill>
-                  <a:srgbClr val="303437"/>
-                </a:solidFill>
-                <a:latin typeface="Noto Sans"/>
-                <a:ea typeface="Noto Sans CJK JP"/>
-                <a:cs typeface="Noto Sans"/>
-              </a:rPr>
-              <a:t>答案：</a:t>
-            </a:r>
-          </a:p>
-        </p:txBody>
-      </p:sp>
-      <p:sp>
-        <p:nvSpPr>
-          <p:cNvPr id="7" name="quote-frame"/>
-          <p:cNvSpPr/>
-          <p:nvPr/>
-        </p:nvSpPr>
-        <p:spPr>
-          <a:xfrm>
-            <a:off x="4617720" y="1664208"/>
-            <a:ext cx="3931920" cy="2201333"/>
-          </a:xfrm>
-          <a:prstGeom prst="rect">
-            <a:avLst/>
-          </a:prstGeom>
-          <a:solidFill>
-            <a:srgbClr val="EBEDEB"/>
-          </a:solidFill>
-          <a:ln>
-            <a:noFill/>
-          </a:ln>
-          <a:effectLst/>
-        </p:spPr>
-        <p:style>
-          <a:lnRef idx="1">
-            <a:schemeClr val="accent1"/>
-          </a:lnRef>
-          <a:fillRef idx="3">
-            <a:schemeClr val="accent1"/>
-          </a:fillRef>
-          <a:effectRef idx="0">
-            <a:schemeClr val="accent1"/>
-          </a:effectRef>
-          <a:fontRef idx="minor">
-            <a:schemeClr val="lt1"/>
-          </a:fontRef>
-        </p:style>
-        <p:txBody>
-          <a:bodyPr rtlCol="0" anchor="t" wrap="square" lIns="177800" rIns="177800" tIns="68241" bIns="127000">
-            <a:noAutofit/>
-          </a:bodyPr>
-          <a:lstStyle/>
-          <a:p>
-            <a:pPr algn="l">
-              <a:lnSpc>
-                <a:spcPts val="2023"/>
-              </a:lnSpc>
-              <a:spcBef>
-                <a:spcPts val="0"/>
-              </a:spcBef>
-              <a:spcAft>
-                <a:spcPts val="0"/>
-              </a:spcAft>
-              <a:buNone/>
-              <a:defRPr sz="1700" b="0">
-                <a:solidFill>
-                  <a:srgbClr val="303437"/>
-                </a:solidFill>
-                <a:latin typeface="Noto Sans"/>
-              </a:defRPr>
-            </a:pPr>
-            <a:r>
-              <a:rPr sz="1700" b="0" lang="ja-JP" altLang="en-US">
-                <a:solidFill>
-                  <a:srgbClr val="303437"/>
-                </a:solidFill>
-                <a:latin typeface="Noto Sans"/>
-                <a:ea typeface="Noto Sans CJK JP"/>
-                <a:cs typeface="Noto Sans"/>
-              </a:rPr>
-              <a:t>この商品レビューは肯定的ですか、否定的ですか？</a:t>
-            </a:r>
-          </a:p>
-          <a:p>
-            <a:pPr algn="l">
-              <a:lnSpc>
-                <a:spcPts val="2023"/>
-              </a:lnSpc>
-              <a:spcBef>
-                <a:spcPts val="0"/>
-              </a:spcBef>
-              <a:spcAft>
-                <a:spcPts val="0"/>
-              </a:spcAft>
-              <a:buNone/>
-              <a:defRPr sz="1700" b="0">
-                <a:solidFill>
-                  <a:srgbClr val="303437"/>
-                </a:solidFill>
-                <a:latin typeface="Noto Sans"/>
-              </a:defRPr>
-            </a:pPr>
-            <a:r>
-              <a:rPr sz="1700" b="0" lang="ja-JP" altLang="en-US">
-                <a:solidFill>
-                  <a:srgbClr val="303437"/>
-                </a:solidFill>
-                <a:latin typeface="Noto Sans"/>
-                <a:ea typeface="Noto Sans CJK JP"/>
-                <a:cs typeface="Noto Sans"/>
-              </a:rPr>
-              <a:t>レビュー：この通販サイトは、速い、良い、お得。速い、良い、お得。</a:t>
-            </a:r>
-          </a:p>
-          <a:p>
-            <a:pPr algn="l">
-              <a:lnSpc>
-                <a:spcPts val="2023"/>
-              </a:lnSpc>
-              <a:spcBef>
-                <a:spcPts val="0"/>
-              </a:spcBef>
-              <a:spcAft>
-                <a:spcPts val="0"/>
-              </a:spcAft>
-              <a:buNone/>
-              <a:defRPr sz="1700" b="0">
-                <a:solidFill>
-                  <a:srgbClr val="303437"/>
-                </a:solidFill>
-                <a:latin typeface="Noto Sans"/>
-              </a:defRPr>
-            </a:pPr>
-            <a:r>
-              <a:rPr sz="1700" b="0" lang="ja-JP" altLang="en-US">
-                <a:solidFill>
-                  <a:srgbClr val="303437"/>
-                </a:solidFill>
-                <a:latin typeface="Noto Sans"/>
-                <a:ea typeface="Noto Sans CJK JP"/>
-                <a:cs typeface="Noto Sans"/>
-              </a:rPr>
-              <a:t>A. 否定的</a:t>
-            </a:r>
-          </a:p>
-          <a:p>
-            <a:pPr algn="l">
-              <a:lnSpc>
-                <a:spcPts val="2023"/>
-              </a:lnSpc>
-              <a:spcBef>
-                <a:spcPts val="0"/>
-              </a:spcBef>
-              <a:spcAft>
-                <a:spcPts val="0"/>
-              </a:spcAft>
-              <a:buNone/>
-              <a:defRPr sz="1700" b="0">
-                <a:solidFill>
-                  <a:srgbClr val="303437"/>
-                </a:solidFill>
-                <a:latin typeface="Noto Sans"/>
-              </a:defRPr>
-            </a:pPr>
-            <a:r>
-              <a:rPr sz="1700" b="0" lang="ja-JP" altLang="en-US">
-                <a:solidFill>
-                  <a:srgbClr val="303437"/>
-                </a:solidFill>
-                <a:latin typeface="Noto Sans"/>
-                <a:ea typeface="Noto Sans CJK JP"/>
-                <a:cs typeface="Noto Sans"/>
-              </a:rPr>
-              <a:t>B. 肯定的</a:t>
-            </a:r>
-          </a:p>
-          <a:p>
-            <a:pPr algn="l">
-              <a:lnSpc>
-                <a:spcPts val="2023"/>
-              </a:lnSpc>
-              <a:spcBef>
-                <a:spcPts val="0"/>
-              </a:spcBef>
-              <a:spcAft>
-                <a:spcPts val="0"/>
-              </a:spcAft>
-              <a:buNone/>
-              <a:defRPr sz="1700" b="0">
-                <a:solidFill>
-                  <a:srgbClr val="303437"/>
-                </a:solidFill>
-                <a:latin typeface="Noto Sans"/>
-              </a:defRPr>
-            </a:pPr>
-            <a:r>
-              <a:rPr sz="1700" b="0" lang="ja-JP" altLang="en-US">
-                <a:solidFill>
-                  <a:srgbClr val="303437"/>
-                </a:solidFill>
-                <a:latin typeface="Noto Sans"/>
-                <a:ea typeface="Noto Sans CJK JP"/>
-                <a:cs typeface="Noto Sans"/>
-              </a:rPr>
-              <a:t>答え：</a:t>
-            </a:r>
-          </a:p>
-        </p:txBody>
-      </p:sp>
-      <p:sp>
-        <p:nvSpPr>
-          <p:cNvPr id="8" name="answer"/>
-          <p:cNvSpPr txBox="1"/>
-          <p:nvPr/>
-        </p:nvSpPr>
-        <p:spPr>
-          <a:xfrm>
-            <a:off x="585216" y="4101591"/>
-            <a:ext cx="7955279" cy="365760"/>
-          </a:xfrm>
-          <a:prstGeom prst="rect">
-            <a:avLst/>
-          </a:prstGeom>
-          <a:noFill/>
-        </p:spPr>
-        <p:txBody>
-          <a:bodyPr wrap="square" lIns="0" rIns="0" tIns="0" bIns="0">
-            <a:noAutofit/>
-          </a:bodyPr>
-          <a:lstStyle/>
-          <a:p>
-            <a:pPr algn="l">
-              <a:lnSpc>
-                <a:spcPts val="2457"/>
-              </a:lnSpc>
-              <a:spcBef>
-                <a:spcPts val="0"/>
-              </a:spcBef>
-              <a:spcAft>
-                <a:spcPts val="0"/>
-              </a:spcAft>
-              <a:buNone/>
-              <a:defRPr sz="2100" b="0">
-                <a:solidFill>
-                  <a:srgbClr val="303437"/>
-                </a:solidFill>
-                <a:latin typeface="Noto Sans"/>
-              </a:defRPr>
-            </a:pPr>
-            <a:r>
-              <a:rPr sz="2100" b="1" lang="ja-JP" altLang="en-US">
-                <a:solidFill>
-                  <a:srgbClr val="B13731"/>
-                </a:solidFill>
-                <a:latin typeface="Noto Sans"/>
-                <a:ea typeface="Noto Sans CJK JP"/>
-                <a:cs typeface="Noto Sans"/>
-              </a:rPr>
-              <a:t>正解：B（肯定的）</a:t>
-            </a:r>
-          </a:p>
-        </p:txBody>
-      </p:sp>
-      <p:sp>
-        <p:nvSpPr>
-          <p:cNvPr id="9" name="sources"/>
-          <p:cNvSpPr txBox="1"/>
-          <p:nvPr/>
-        </p:nvSpPr>
-        <p:spPr>
-          <a:xfrm>
-            <a:off x="502920" y="4700016"/>
-            <a:ext cx="8183879" cy="530352"/>
-          </a:xfrm>
-          <a:prstGeom prst="rect">
-            <a:avLst/>
-          </a:prstGeom>
-          <a:noFill/>
-        </p:spPr>
-        <p:txBody>
-          <a:bodyPr wrap="square" lIns="0" rIns="0" tIns="0" bIns="0">
-            <a:noAutofit/>
-          </a:bodyPr>
-          <a:lstStyle/>
-          <a:p>
-            <a:pPr algn="l">
-              <a:lnSpc>
-                <a:spcPts val="940"/>
-              </a:lnSpc>
-              <a:spcBef>
-                <a:spcPts val="0"/>
-              </a:spcBef>
-              <a:spcAft>
-                <a:spcPts val="140"/>
-              </a:spcAft>
-              <a:buNone/>
-              <a:defRPr sz="810" b="0">
-                <a:solidFill>
-                  <a:srgbClr val="303437"/>
-                </a:solidFill>
-                <a:latin typeface="Noto Sans"/>
-              </a:defRPr>
-            </a:pPr>
+              <a:t>  </a:t>
+            </a:r>
             <a:r>
               <a:rPr sz="810" b="0" lang="ja-JP" altLang="en-US">
                 <a:solidFill>
@@ -12451,34 +11996,9 @@
                 <a:latin typeface="Noto Sans"/>
                 <a:ea typeface="Noto Sans CJK JP"/>
                 <a:cs typeface="Noto Sans"/>
-              </a:rPr>
-              <a:t>[1] Stanford CRFM (n.d.). CLEVASentimentAnalysisScenario. HELM.</a:t>
-            </a:r>
-          </a:p>
-          <a:p>
-            <a:pPr>
-              <a:lnSpc>
-                <a:spcPts val="940"/>
-              </a:lnSpc>
-              <a:buNone/>
-              <a:defRPr sz="810" b="0">
-                <a:solidFill>
-                  <a:srgbClr val="303437"/>
-                </a:solidFill>
-                <a:latin typeface="Noto Sans"/>
-              </a:defRPr>
-            </a:pPr>
-            <a:r>
-              <a:rPr sz="810" b="0" lang="ja-JP" altLang="en-US">
-                <a:solidFill>
-                  <a:srgbClr val="626669"/>
-                </a:solidFill>
-                <a:latin typeface="Noto Sans"/>
-                <a:ea typeface="Noto Sans CJK JP"/>
-                <a:cs typeface="Noto Sans"/>
                 <a:hlinkClick r:id="rId2"/>
               </a:rPr>
-              <a:t>https://github.com/stanford-crfm/helm/blob/v0.4.0/src/helm/benchmark/scenarios/cleva_scenario.py</a:t>
+              <a:t>https://github.com/CLUEbenchmark/FewCLUE</a:t>
             </a:r>
           </a:p>
         </p:txBody>
@@ -12544,127 +12064,14 @@
                 <a:ea typeface="Noto Sans CJK JP"/>
                 <a:cs typeface="Noto Sans"/>
               </a:rPr>
-              <a:t>公式配布先と、利用条件</a:t>
-            </a:r>
-          </a:p>
-        </p:txBody>
-      </p:sp>
-      <p:sp>
-        <p:nvSpPr>
-          <p:cNvPr id="3" name="Text Placeholder 2"/>
-          <p:cNvSpPr>
-            <a:spLocks noGrp="1"/>
-          </p:cNvSpPr>
-          <p:nvPr>
-            <p:ph type="body" idx="1"/>
-          </p:nvPr>
-        </p:nvSpPr>
-        <p:spPr>
-          <a:xfrm>
-            <a:off x="594360" y="1463040"/>
-            <a:ext cx="7955279" cy="3044952"/>
-          </a:xfrm>
-        </p:spPr>
-        <p:txBody>
-          <a:bodyPr wrap="square" tIns="91440" bIns="91440">
-            <a:noAutofit/>
-          </a:bodyPr>
-          <a:lstStyle/>
-          <a:p>
-            <a:pPr marL="457200" indent="-355600">
-              <a:lnSpc>
-                <a:spcPts val="2379"/>
-              </a:lnSpc>
-              <a:spcAft>
-                <a:spcPts val="700"/>
-              </a:spcAft>
-              <a:buSzPct val="66500"/>
-              <a:buFont typeface="Noto Sans CJK JP"/>
-              <a:buChar char="●"/>
-              <a:defRPr sz="2000" b="0">
-                <a:solidFill>
-                  <a:srgbClr val="303437"/>
-                </a:solidFill>
-                <a:latin typeface="Noto Sans"/>
-              </a:defRPr>
-            </a:pPr>
-            <a:r>
-              <a:rPr sz="2000" b="0" lang="ja-JP" altLang="en-US">
-                <a:solidFill>
-                  <a:srgbClr val="303437"/>
-                </a:solidFill>
-                <a:latin typeface="Noto Sans"/>
-                <a:ea typeface="Noto Sans CJK JP"/>
-                <a:cs typeface="Noto Sans"/>
-              </a:rPr>
-              <a:t>FewCLUEの公式リポジトリから、EPRSTMTの学習用・開発用・テスト用データを入手できる。</a:t>
-            </a:r>
-          </a:p>
-          <a:p>
-            <a:pPr marL="457200" indent="-355600">
-              <a:lnSpc>
-                <a:spcPts val="2379"/>
-              </a:lnSpc>
-              <a:spcAft>
-                <a:spcPts val="700"/>
-              </a:spcAft>
-              <a:buSzPct val="66500"/>
-              <a:buFont typeface="Noto Sans CJK JP"/>
-              <a:buChar char="●"/>
-              <a:defRPr sz="2000" b="0">
-                <a:solidFill>
-                  <a:srgbClr val="303437"/>
-                </a:solidFill>
-                <a:latin typeface="Noto Sans"/>
-              </a:defRPr>
-            </a:pPr>
-            <a:r>
-              <a:rPr sz="2000" b="0" lang="ja-JP" altLang="en-US">
-                <a:solidFill>
-                  <a:srgbClr val="303437"/>
-                </a:solidFill>
-                <a:latin typeface="Noto Sans"/>
-                <a:ea typeface="Noto Sans CJK JP"/>
-                <a:cs typeface="Noto Sans"/>
-              </a:rPr>
-              <a:t>付属するBERTコードにはApache 2.0が適用される。一方、商品レビュー本文を含むデータ全体の利用条件は明示されていないため、再利用の条件は配布元への確認が必要。</a:t>
-            </a:r>
-          </a:p>
-          <a:p>
-            <a:pPr marL="457200" indent="-355600">
-              <a:lnSpc>
-                <a:spcPts val="2379"/>
-              </a:lnSpc>
-              <a:spcAft>
-                <a:spcPts val="0"/>
-              </a:spcAft>
-              <a:buSzPct val="66500"/>
-              <a:buFont typeface="Noto Sans CJK JP"/>
-              <a:buChar char="●"/>
-              <a:defRPr sz="2000" b="0">
-                <a:solidFill>
-                  <a:srgbClr val="303437"/>
-                </a:solidFill>
-                <a:latin typeface="Noto Sans"/>
-              </a:defRPr>
-            </a:pPr>
-            <a:r>
-              <a:rPr sz="2000" b="0" lang="ja-JP" altLang="en-US">
-                <a:solidFill>
-                  <a:srgbClr val="303437"/>
-                </a:solidFill>
-                <a:latin typeface="Noto Sans"/>
-                <a:ea typeface="Noto Sans CJK JP"/>
-                <a:cs typeface="Noto Sans"/>
-              </a:rPr>
-              <a:t>CLEVAではFewCLUEの感情分析を採用しているが、評価対象のレビュー全体や抽出方法の詳細は公開資料からは確認できない。</a:t>
-            </a:r>
-          </a:p>
-        </p:txBody>
-      </p:sp>
-      <p:sp>
-        <p:nvSpPr>
-          <p:cNvPr id="4" name="Title 3"/>
+              <a:t>JSONファイルから、レビューとラベルを読む</a:t>
+            </a:r>
+          </a:p>
+        </p:txBody>
+      </p:sp>
+      <p:sp>
+        <p:nvSpPr>
+          <p:cNvPr id="3" name="Title 2"/>
           <p:cNvSpPr>
             <a:spLocks noGrp="1"/>
           </p:cNvSpPr>
@@ -12705,21 +12112,217 @@
                 <a:ea typeface="Noto Sans CJK JP"/>
                 <a:cs typeface="Noto Sans"/>
               </a:rPr>
-              <a:t>4. CLEVAでの利用と入手方法</a:t>
-            </a:r>
-          </a:p>
-        </p:txBody>
-      </p:sp>
-      <p:sp>
-        <p:nvSpPr>
-          <p:cNvPr id="5" name="sources"/>
+              <a:t>4. 入手方法と利用条件</a:t>
+            </a:r>
+          </a:p>
+        </p:txBody>
+      </p:sp>
+      <p:sp>
+        <p:nvSpPr>
+          <p:cNvPr id="4" name="code-frame"/>
+          <p:cNvSpPr/>
+          <p:nvPr/>
+        </p:nvSpPr>
+        <p:spPr>
+          <a:xfrm>
+            <a:off x="548640" y="1508760"/>
+            <a:ext cx="8046720" cy="1456266"/>
+          </a:xfrm>
+          <a:prstGeom prst="rect">
+            <a:avLst/>
+          </a:prstGeom>
+          <a:solidFill>
+            <a:srgbClr val="EBEDEB"/>
+          </a:solidFill>
+          <a:ln>
+            <a:noFill/>
+          </a:ln>
+          <a:effectLst/>
+        </p:spPr>
+        <p:style>
+          <a:lnRef idx="1">
+            <a:schemeClr val="accent1"/>
+          </a:lnRef>
+          <a:fillRef idx="3">
+            <a:schemeClr val="accent1"/>
+          </a:fillRef>
+          <a:effectRef idx="0">
+            <a:schemeClr val="accent1"/>
+          </a:effectRef>
+          <a:fontRef idx="minor">
+            <a:schemeClr val="lt1"/>
+          </a:fontRef>
+        </p:style>
+        <p:txBody>
+          <a:bodyPr rtlCol="0" anchor="t" wrap="none" lIns="152400" rIns="152400" tIns="60536" bIns="127000"/>
+          <a:lstStyle/>
+          <a:p>
+            <a:pPr algn="l">
+              <a:lnSpc>
+                <a:spcPts val="2000"/>
+              </a:lnSpc>
+              <a:spcBef>
+                <a:spcPts val="0"/>
+              </a:spcBef>
+              <a:spcAft>
+                <a:spcPts val="0"/>
+              </a:spcAft>
+              <a:buNone/>
+              <a:defRPr sz="1600" b="0">
+                <a:solidFill>
+                  <a:srgbClr val="303437"/>
+                </a:solidFill>
+                <a:latin typeface="Noto Sans"/>
+              </a:defRPr>
+            </a:pPr>
+            <a:r>
+              <a:rPr sz="1600" b="0" lang="ja-JP" altLang="en-US">
+                <a:solidFill>
+                  <a:srgbClr val="303437"/>
+                </a:solidFill>
+                <a:latin typeface="Liberation Mono"/>
+                <a:ea typeface="Noto Sans CJK JP"/>
+                <a:cs typeface="Liberation Mono"/>
+              </a:rPr>
+              <a:t>import json</a:t>
+            </a:r>
+          </a:p>
+          <a:p>
+            <a:pPr algn="l">
+              <a:lnSpc>
+                <a:spcPts val="2000"/>
+              </a:lnSpc>
+              <a:spcBef>
+                <a:spcPts val="0"/>
+              </a:spcBef>
+              <a:spcAft>
+                <a:spcPts val="0"/>
+              </a:spcAft>
+              <a:buNone/>
+              <a:defRPr sz="1600" b="0">
+                <a:solidFill>
+                  <a:srgbClr val="303437"/>
+                </a:solidFill>
+                <a:latin typeface="Noto Sans"/>
+              </a:defRPr>
+            </a:pPr>
+            <a:r>
+              <a:rPr sz="1600" b="0" lang="ja-JP" altLang="en-US">
+                <a:solidFill>
+                  <a:srgbClr val="303437"/>
+                </a:solidFill>
+                <a:latin typeface="Liberation Mono"/>
+                <a:ea typeface="Noto Sans CJK JP"/>
+                <a:cs typeface="Liberation Mono"/>
+              </a:rPr>
+              <a:t>with open('train_0.json', encoding='utf-8') as f:</a:t>
+            </a:r>
+          </a:p>
+          <a:p>
+            <a:pPr algn="l">
+              <a:lnSpc>
+                <a:spcPts val="2000"/>
+              </a:lnSpc>
+              <a:spcBef>
+                <a:spcPts val="0"/>
+              </a:spcBef>
+              <a:spcAft>
+                <a:spcPts val="0"/>
+              </a:spcAft>
+              <a:buNone/>
+              <a:defRPr sz="1600" b="0">
+                <a:solidFill>
+                  <a:srgbClr val="303437"/>
+                </a:solidFill>
+                <a:latin typeface="Noto Sans"/>
+              </a:defRPr>
+            </a:pPr>
+            <a:r>
+              <a:rPr sz="1600" b="0" lang="ja-JP" altLang="en-US">
+                <a:solidFill>
+                  <a:srgbClr val="303437"/>
+                </a:solidFill>
+                <a:latin typeface="Liberation Mono"/>
+                <a:ea typeface="Noto Sans CJK JP"/>
+                <a:cs typeface="Liberation Mono"/>
+              </a:rPr>
+              <a:t>    review = json.loads(next(f))</a:t>
+            </a:r>
+          </a:p>
+          <a:p>
+            <a:pPr algn="l">
+              <a:lnSpc>
+                <a:spcPts val="2000"/>
+              </a:lnSpc>
+              <a:spcBef>
+                <a:spcPts val="0"/>
+              </a:spcBef>
+              <a:spcAft>
+                <a:spcPts val="0"/>
+              </a:spcAft>
+              <a:buNone/>
+              <a:defRPr sz="1600" b="0">
+                <a:solidFill>
+                  <a:srgbClr val="303437"/>
+                </a:solidFill>
+                <a:latin typeface="Noto Sans"/>
+              </a:defRPr>
+            </a:pPr>
+            <a:r>
+              <a:rPr sz="1600" b="0" lang="ja-JP" altLang="en-US">
+                <a:solidFill>
+                  <a:srgbClr val="303437"/>
+                </a:solidFill>
+                <a:latin typeface="Liberation Mono"/>
+                <a:ea typeface="Noto Sans CJK JP"/>
+                <a:cs typeface="Liberation Mono"/>
+              </a:rPr>
+              <a:t>print(review['sentence'])</a:t>
+            </a:r>
+          </a:p>
+          <a:p>
+            <a:pPr algn="l">
+              <a:lnSpc>
+                <a:spcPts val="2000"/>
+              </a:lnSpc>
+              <a:spcBef>
+                <a:spcPts val="0"/>
+              </a:spcBef>
+              <a:spcAft>
+                <a:spcPts val="0"/>
+              </a:spcAft>
+              <a:buNone/>
+              <a:defRPr sz="1600" b="0">
+                <a:solidFill>
+                  <a:srgbClr val="303437"/>
+                </a:solidFill>
+                <a:latin typeface="Noto Sans"/>
+              </a:defRPr>
+            </a:pPr>
+            <a:r>
+              <a:rPr sz="1600" b="0" lang="ja-JP" altLang="en-US">
+                <a:solidFill>
+                  <a:srgbClr val="303437"/>
+                </a:solidFill>
+                <a:latin typeface="Liberation Mono"/>
+                <a:ea typeface="Noto Sans CJK JP"/>
+                <a:cs typeface="Liberation Mono"/>
+              </a:rPr>
+              <a:t>print(review['label'])</a:t>
+            </a:r>
+          </a:p>
+        </p:txBody>
+      </p:sp>
+      <p:sp>
+        <p:nvSpPr>
+          <p:cNvPr id="5" name="TextBox 4"/>
           <p:cNvSpPr txBox="1"/>
           <p:nvPr/>
         </p:nvSpPr>
         <p:spPr>
           <a:xfrm>
-            <a:off x="502920" y="4700016"/>
-            <a:ext cx="8183879" cy="530352"/>
+            <a:off x="594360" y="3166195"/>
+            <a:ext cx="7955279" cy="777240"/>
           </a:xfrm>
           <a:prstGeom prst="rect">
             <a:avLst/>
@@ -12734,6 +12337,60 @@
           <a:p>
             <a:pPr algn="l">
               <a:lnSpc>
+                <a:spcPts val="2222"/>
+              </a:lnSpc>
+              <a:spcBef>
+                <a:spcPts val="0"/>
+              </a:spcBef>
+              <a:spcAft>
+                <a:spcPts val="0"/>
+              </a:spcAft>
+              <a:buNone/>
+              <a:defRPr sz="1900" b="0">
+                <a:solidFill>
+                  <a:srgbClr val="303437"/>
+                </a:solidFill>
+                <a:latin typeface="Noto Sans"/>
+              </a:defRPr>
+            </a:pPr>
+            <a:r>
+              <a:rPr sz="1900" b="0" lang="ja-JP" altLang="en-US">
+                <a:solidFill>
+                  <a:srgbClr val="303437"/>
+                </a:solidFill>
+                <a:latin typeface="Noto Sans"/>
+                <a:ea typeface="Noto Sans CJK JP"/>
+                <a:cs typeface="Noto Sans"/>
+              </a:rPr>
+              <a:t>1行が1件のレビュー。sentenceが本文、labelがPositiveまたはNegative。</a:t>
+            </a:r>
+          </a:p>
+        </p:txBody>
+      </p:sp>
+      <p:sp>
+        <p:nvSpPr>
+          <p:cNvPr id="6" name="sources"/>
+          <p:cNvSpPr txBox="1"/>
+          <p:nvPr/>
+        </p:nvSpPr>
+        <p:spPr>
+          <a:xfrm>
+            <a:off x="502920" y="4700016"/>
+            <a:ext cx="8183879" cy="530352"/>
+          </a:xfrm>
+          <a:prstGeom prst="rect">
+            <a:avLst/>
+          </a:prstGeom>
+          <a:noFill/>
+        </p:spPr>
+        <p:txBody>
+          <a:bodyPr wrap="square" lIns="0" rIns="0" tIns="0" bIns="0">
+            <a:noAutofit/>
+          </a:bodyPr>
+          <a:lstStyle/>
+          <a:p>
+            <a:pPr algn="l">
+              <a:lnSpc>
                 <a:spcPts val="940"/>
               </a:lnSpc>
               <a:spcBef>
@@ -12759,7 +12416,7 @@
                 <a:ea typeface="Noto Sans CJK JP"/>
                 <a:cs typeface="Noto Sans"/>
               </a:rPr>
-              <a:t>[1] CLUE team (n.d.). FewCLUE: 小样本学习测评基准. GitHub.</a:t>
+              <a:t>[1] ICIP Lab / CLUE team (n.d.). EPRSTMT (FewCLUE). GitHub.</a:t>
             </a:r>
             <a:r>
               <a:rPr sz="810" b="0" lang="ja-JP" altLang="en-US">
@@ -12782,58 +12439,7 @@
                 <a:cs typeface="Noto Sans"/>
                 <a:hlinkClick r:id="rId2"/>
               </a:rPr>
-              <a:t>https://github.com/CLUEbenchmark/FewCLUE</a:t>
-            </a:r>
-          </a:p>
-          <a:p>
-            <a:pPr>
-              <a:lnSpc>
-                <a:spcPts val="940"/>
-              </a:lnSpc>
-              <a:spcAft>
-                <a:spcPts val="140"/>
-              </a:spcAft>
-              <a:buNone/>
-              <a:defRPr sz="810" b="0">
-                <a:solidFill>
-                  <a:srgbClr val="303437"/>
-                </a:solidFill>
-                <a:latin typeface="Noto Sans"/>
-              </a:defRPr>
-            </a:pPr>
-            <a:r>
-              <a:rPr sz="810" b="0" lang="ja-JP" altLang="en-US">
-                <a:solidFill>
-                  <a:srgbClr val="626669"/>
-                </a:solidFill>
-                <a:latin typeface="Noto Sans"/>
-                <a:ea typeface="Noto Sans CJK JP"/>
-                <a:cs typeface="Noto Sans"/>
-              </a:rPr>
-              <a:t>[2] Li et al. (2023). CLEVA: Chinese Language Models EVAluation Platform. EMNLP System Demonstrations.</a:t>
-            </a:r>
-            <a:r>
-              <a:rPr sz="810" b="0" lang="ja-JP" altLang="en-US">
-                <a:solidFill>
-                  <a:srgbClr val="626669"/>
-                </a:solidFill>
-                <a:latin typeface="Noto Sans"/>
-                <a:ea typeface="Noto Sans CJK JP"/>
-                <a:cs typeface="Noto Sans"/>
-              </a:rPr>
-              <a:t>  </a:t>
-            </a:r>
-            <a:r>
-              <a:rPr sz="810" b="0" lang="ja-JP" altLang="en-US">
-                <a:solidFill>
-                  <a:srgbClr val="626669"/>
-                </a:solidFill>
-                <a:latin typeface="Noto Sans"/>
-                <a:ea typeface="Noto Sans CJK JP"/>
-                <a:cs typeface="Noto Sans"/>
-                <a:hlinkClick r:id="rId3"/>
-              </a:rPr>
-              <a:t>https://aclanthology.org/2023.emnlp-demo.17/</a:t>
+              <a:t>https://github.com/CLUEbenchmark/FewCLUE/tree/main/datasets/eprstmt</a:t>
             </a:r>
           </a:p>
         </p:txBody>
@@ -12899,14 +12505,97 @@
                 <a:ea typeface="Noto Sans CJK JP"/>
                 <a:cs typeface="Noto Sans"/>
               </a:rPr>
-              <a:t>JSONファイルから、レビューとラベルを読む</a:t>
-            </a:r>
-          </a:p>
-        </p:txBody>
-      </p:sp>
-      <p:sp>
-        <p:nvSpPr>
-          <p:cNvPr id="3" name="Title 2"/>
+              <a:t>短いレビューで、少数例学習の力を測る</a:t>
+            </a:r>
+          </a:p>
+        </p:txBody>
+      </p:sp>
+      <p:sp>
+        <p:nvSpPr>
+          <p:cNvPr id="3" name="Text Placeholder 2"/>
+          <p:cNvSpPr>
+            <a:spLocks noGrp="1"/>
+          </p:cNvSpPr>
+          <p:nvPr>
+            <p:ph type="body" idx="1"/>
+          </p:nvPr>
+        </p:nvSpPr>
+        <p:spPr>
+          <a:xfrm>
+            <a:off x="594360" y="1463040"/>
+            <a:ext cx="7955279" cy="3044952"/>
+          </a:xfrm>
+        </p:spPr>
+        <p:txBody>
+          <a:bodyPr wrap="square" tIns="91440" bIns="91440">
+            <a:noAutofit/>
+          </a:bodyPr>
+          <a:lstStyle/>
+          <a:p>
+            <a:pPr marL="457200" indent="-355600">
+              <a:lnSpc>
+                <a:spcPts val="2499"/>
+              </a:lnSpc>
+              <a:spcAft>
+                <a:spcPts val="700"/>
+              </a:spcAft>
+              <a:buSzPct val="63333"/>
+              <a:buFont typeface="Noto Sans CJK JP"/>
+              <a:buChar char="●"/>
+              <a:defRPr sz="2100" b="0">
+                <a:solidFill>
+                  <a:srgbClr val="303437"/>
+                </a:solidFill>
+                <a:latin typeface="Noto Sans"/>
+              </a:defRPr>
+            </a:pPr>
+            <a:r>
+              <a:rPr sz="2100" b="0" lang="ja-JP" altLang="en-US">
+                <a:solidFill>
+                  <a:srgbClr val="303437"/>
+                </a:solidFill>
+                <a:latin typeface="Noto Sans"/>
+                <a:ea typeface="Noto Sans CJK JP"/>
+                <a:cs typeface="Noto Sans"/>
+              </a:rPr>
+              <a:t>EPRSTMTは、中国語の商品レビューを肯定的・否定的に分類するデータセット。32件ずつの小さな学習セットで、少数例から学ぶ方法を評価する。</a:t>
+            </a:r>
+          </a:p>
+          <a:p>
+            <a:pPr marL="457200" indent="-355600">
+              <a:lnSpc>
+                <a:spcPts val="2499"/>
+              </a:lnSpc>
+              <a:spcAft>
+                <a:spcPts val="700"/>
+              </a:spcAft>
+              <a:buSzPct val="63333"/>
+              <a:buFont typeface="Noto Sans CJK JP"/>
+              <a:buChar char="●"/>
+              <a:defRPr sz="2100" b="0">
+                <a:solidFill>
+                  <a:srgbClr val="303437"/>
+                </a:solidFill>
+                <a:latin typeface="Noto Sans"/>
+              </a:defRPr>
+            </a:pPr>
+            <a:r>
+              <a:rPr sz="2100" b="0" lang="ja-JP" altLang="en-US">
+                <a:solidFill>
+                  <a:srgbClr val="303437"/>
+                </a:solidFill>
+                <a:latin typeface="Noto Sans"/>
+                <a:ea typeface="Noto Sans CJK JP"/>
+                <a:cs typeface="Noto Sans"/>
+              </a:rPr>
+              <a:t>短い文章にも、複数の評価や皮肉が含まれる。良い点と不満の両方があるレビューや、文章の印象とラベルが合いにくい例が、分類の難しさを表している。</a:t>
+            </a:r>
+          </a:p>
+        </p:txBody>
+      </p:sp>
+      <p:sp>
+        <p:nvSpPr>
+          <p:cNvPr id="4" name="Title 3"/>
           <p:cNvSpPr>
             <a:spLocks noGrp="1"/>
           </p:cNvSpPr>
@@ -12947,217 +12636,21 @@
                 <a:ea typeface="Noto Sans CJK JP"/>
                 <a:cs typeface="Noto Sans"/>
               </a:rPr>
-              <a:t>4. CLEVAでの利用と入手方法</a:t>
-            </a:r>
-          </a:p>
-        </p:txBody>
-      </p:sp>
-      <p:sp>
-        <p:nvSpPr>
-          <p:cNvPr id="4" name="code-frame"/>
-          <p:cNvSpPr/>
-          <p:nvPr/>
-        </p:nvSpPr>
-        <p:spPr>
-          <a:xfrm>
-            <a:off x="548640" y="1508760"/>
-            <a:ext cx="8046720" cy="1456266"/>
-          </a:xfrm>
-          <a:prstGeom prst="rect">
-            <a:avLst/>
-          </a:prstGeom>
-          <a:solidFill>
-            <a:srgbClr val="EBEDEB"/>
-          </a:solidFill>
-          <a:ln>
-            <a:noFill/>
-          </a:ln>
-          <a:effectLst/>
-        </p:spPr>
-        <p:style>
-          <a:lnRef idx="1">
-            <a:schemeClr val="accent1"/>
-          </a:lnRef>
-          <a:fillRef idx="3">
-            <a:schemeClr val="accent1"/>
-          </a:fillRef>
-          <a:effectRef idx="0">
-            <a:schemeClr val="accent1"/>
-          </a:effectRef>
-          <a:fontRef idx="minor">
-            <a:schemeClr val="lt1"/>
-          </a:fontRef>
-        </p:style>
-        <p:txBody>
-          <a:bodyPr rtlCol="0" anchor="t" wrap="none" lIns="152400" rIns="152400" tIns="60536" bIns="127000"/>
-          <a:lstStyle/>
-          <a:p>
-            <a:pPr algn="l">
-              <a:lnSpc>
-                <a:spcPts val="2000"/>
-              </a:lnSpc>
-              <a:spcBef>
-                <a:spcPts val="0"/>
-              </a:spcBef>
-              <a:spcAft>
-                <a:spcPts val="0"/>
-              </a:spcAft>
-              <a:buNone/>
-              <a:defRPr sz="1600" b="0">
-                <a:solidFill>
-                  <a:srgbClr val="303437"/>
-                </a:solidFill>
-                <a:latin typeface="Noto Sans"/>
-              </a:defRPr>
-            </a:pPr>
-            <a:r>
-              <a:rPr sz="1600" b="0" lang="ja-JP" altLang="en-US">
-                <a:solidFill>
-                  <a:srgbClr val="303437"/>
-                </a:solidFill>
-                <a:latin typeface="Liberation Mono"/>
-                <a:ea typeface="Noto Sans CJK JP"/>
-                <a:cs typeface="Liberation Mono"/>
-              </a:rPr>
-              <a:t>import json</a:t>
-            </a:r>
-          </a:p>
-          <a:p>
-            <a:pPr algn="l">
-              <a:lnSpc>
-                <a:spcPts val="2000"/>
-              </a:lnSpc>
-              <a:spcBef>
-                <a:spcPts val="0"/>
-              </a:spcBef>
-              <a:spcAft>
-                <a:spcPts val="0"/>
-              </a:spcAft>
-              <a:buNone/>
-              <a:defRPr sz="1600" b="0">
-                <a:solidFill>
-                  <a:srgbClr val="303437"/>
-                </a:solidFill>
-                <a:latin typeface="Noto Sans"/>
-              </a:defRPr>
-            </a:pPr>
-            <a:r>
-              <a:rPr sz="1600" b="0" lang="ja-JP" altLang="en-US">
-                <a:solidFill>
-                  <a:srgbClr val="303437"/>
-                </a:solidFill>
-                <a:latin typeface="Liberation Mono"/>
-                <a:ea typeface="Noto Sans CJK JP"/>
-                <a:cs typeface="Liberation Mono"/>
-              </a:rPr>
-              <a:t>with open('train_0.json', encoding='utf-8') as f:</a:t>
-            </a:r>
-          </a:p>
-          <a:p>
-            <a:pPr algn="l">
-              <a:lnSpc>
-                <a:spcPts val="2000"/>
-              </a:lnSpc>
-              <a:spcBef>
-                <a:spcPts val="0"/>
-              </a:spcBef>
-              <a:spcAft>
-                <a:spcPts val="0"/>
-              </a:spcAft>
-              <a:buNone/>
-              <a:defRPr sz="1600" b="0">
-                <a:solidFill>
-                  <a:srgbClr val="303437"/>
-                </a:solidFill>
-                <a:latin typeface="Noto Sans"/>
-              </a:defRPr>
-            </a:pPr>
-            <a:r>
-              <a:rPr sz="1600" b="0" lang="ja-JP" altLang="en-US">
-                <a:solidFill>
-                  <a:srgbClr val="303437"/>
-                </a:solidFill>
-                <a:latin typeface="Liberation Mono"/>
-                <a:ea typeface="Noto Sans CJK JP"/>
-                <a:cs typeface="Liberation Mono"/>
-              </a:rPr>
-              <a:t>    review = json.loads(next(f))</a:t>
-            </a:r>
-          </a:p>
-          <a:p>
-            <a:pPr algn="l">
-              <a:lnSpc>
-                <a:spcPts val="2000"/>
-              </a:lnSpc>
-              <a:spcBef>
-                <a:spcPts val="0"/>
-              </a:spcBef>
-              <a:spcAft>
-                <a:spcPts val="0"/>
-              </a:spcAft>
-              <a:buNone/>
-              <a:defRPr sz="1600" b="0">
-                <a:solidFill>
-                  <a:srgbClr val="303437"/>
-                </a:solidFill>
-                <a:latin typeface="Noto Sans"/>
-              </a:defRPr>
-            </a:pPr>
-            <a:r>
-              <a:rPr sz="1600" b="0" lang="ja-JP" altLang="en-US">
-                <a:solidFill>
-                  <a:srgbClr val="303437"/>
-                </a:solidFill>
-                <a:latin typeface="Liberation Mono"/>
-                <a:ea typeface="Noto Sans CJK JP"/>
-                <a:cs typeface="Liberation Mono"/>
-              </a:rPr>
-              <a:t>print(review['sentence'])</a:t>
-            </a:r>
-          </a:p>
-          <a:p>
-            <a:pPr algn="l">
-              <a:lnSpc>
-                <a:spcPts val="2000"/>
-              </a:lnSpc>
-              <a:spcBef>
-                <a:spcPts val="0"/>
-              </a:spcBef>
-              <a:spcAft>
-                <a:spcPts val="0"/>
-              </a:spcAft>
-              <a:buNone/>
-              <a:defRPr sz="1600" b="0">
-                <a:solidFill>
-                  <a:srgbClr val="303437"/>
-                </a:solidFill>
-                <a:latin typeface="Noto Sans"/>
-              </a:defRPr>
-            </a:pPr>
-            <a:r>
-              <a:rPr sz="1600" b="0" lang="ja-JP" altLang="en-US">
-                <a:solidFill>
-                  <a:srgbClr val="303437"/>
-                </a:solidFill>
-                <a:latin typeface="Liberation Mono"/>
-                <a:ea typeface="Noto Sans CJK JP"/>
-                <a:cs typeface="Liberation Mono"/>
-              </a:rPr>
-              <a:t>print(review['label'])</a:t>
-            </a:r>
-          </a:p>
-        </p:txBody>
-      </p:sp>
-      <p:sp>
-        <p:nvSpPr>
-          <p:cNvPr id="5" name="TextBox 4"/>
+              <a:t>4. 入手方法と利用条件</a:t>
+            </a:r>
+          </a:p>
+        </p:txBody>
+      </p:sp>
+      <p:sp>
+        <p:nvSpPr>
+          <p:cNvPr id="5" name="sources"/>
           <p:cNvSpPr txBox="1"/>
           <p:nvPr/>
         </p:nvSpPr>
         <p:spPr>
           <a:xfrm>
-            <a:off x="594360" y="3166195"/>
-            <a:ext cx="7955279" cy="777240"/>
+            <a:off x="502920" y="4700016"/>
+            <a:ext cx="8183879" cy="530352"/>
           </a:xfrm>
           <a:prstGeom prst="rect">
             <a:avLst/>
@@ -13172,60 +12665,6 @@
           <a:p>
             <a:pPr algn="l">
               <a:lnSpc>
-                <a:spcPts val="2222"/>
-              </a:lnSpc>
-              <a:spcBef>
-                <a:spcPts val="0"/>
-              </a:spcBef>
-              <a:spcAft>
-                <a:spcPts val="0"/>
-              </a:spcAft>
-              <a:buNone/>
-              <a:defRPr sz="1900" b="0">
-                <a:solidFill>
-                  <a:srgbClr val="303437"/>
-                </a:solidFill>
-                <a:latin typeface="Noto Sans"/>
-              </a:defRPr>
-            </a:pPr>
-            <a:r>
-              <a:rPr sz="1900" b="0" lang="ja-JP" altLang="en-US">
-                <a:solidFill>
-                  <a:srgbClr val="303437"/>
-                </a:solidFill>
-                <a:latin typeface="Noto Sans"/>
-                <a:ea typeface="Noto Sans CJK JP"/>
-                <a:cs typeface="Noto Sans"/>
-              </a:rPr>
-              <a:t>1行が1件のレビュー。sentenceが本文、labelがPositiveまたはNegative。</a:t>
-            </a:r>
-          </a:p>
-        </p:txBody>
-      </p:sp>
-      <p:sp>
-        <p:nvSpPr>
-          <p:cNvPr id="6" name="sources"/>
-          <p:cNvSpPr txBox="1"/>
-          <p:nvPr/>
-        </p:nvSpPr>
-        <p:spPr>
-          <a:xfrm>
-            <a:off x="502920" y="4700016"/>
-            <a:ext cx="8183879" cy="530352"/>
-          </a:xfrm>
-          <a:prstGeom prst="rect">
-            <a:avLst/>
-          </a:prstGeom>
-          <a:noFill/>
-        </p:spPr>
-        <p:txBody>
-          <a:bodyPr wrap="square" lIns="0" rIns="0" tIns="0" bIns="0">
-            <a:noAutofit/>
-          </a:bodyPr>
-          <a:lstStyle/>
-          <a:p>
-            <a:pPr algn="l">
-              <a:lnSpc>
                 <a:spcPts val="940"/>
               </a:lnSpc>
               <a:spcBef>
@@ -13251,7 +12690,7 @@
                 <a:ea typeface="Noto Sans CJK JP"/>
                 <a:cs typeface="Noto Sans"/>
               </a:rPr>
-              <a:t>[1] ICIP Lab / CLUE team (n.d.). EPRSTMT (FewCLUE). GitHub.</a:t>
+              <a:t>[1] Xu et al. (2021). FewCLUE: A Chinese Few-shot Learning Evaluation Benchmark. arXiv.</a:t>
             </a:r>
             <a:r>
               <a:rPr sz="810" b="0" lang="ja-JP" altLang="en-US">
@@ -13274,7 +12713,7 @@
                 <a:cs typeface="Noto Sans"/>
                 <a:hlinkClick r:id="rId2"/>
               </a:rPr>
-              <a:t>https://github.com/CLUEbenchmark/FewCLUE/tree/main/datasets/eprstmt</a:t>
+              <a:t>https://arxiv.org/abs/2107.07498</a:t>
             </a:r>
           </a:p>
         </p:txBody>
@@ -13309,158 +12748,45 @@
         </p:nvSpPr>
         <p:spPr>
           <a:xfrm>
-            <a:off x="468172" y="650138"/>
-            <a:ext cx="8206740" cy="616305"/>
-          </a:xfrm>
-        </p:spPr>
-        <p:txBody>
-          <a:bodyPr wrap="square" lIns="0" rIns="0" tIns="0" bIns="0">
+            <a:off x="548640" y="2484835"/>
+            <a:ext cx="8046720" cy="686816"/>
+          </a:xfrm>
+        </p:spPr>
+        <p:txBody>
+          <a:bodyPr wrap="square" lIns="0" rIns="0" tIns="0" bIns="101600" anchor="ctr">
             <a:noAutofit/>
           </a:bodyPr>
           <a:lstStyle/>
           <a:p>
-            <a:pPr algn="l">
+            <a:pPr algn="ctr">
               <a:lnSpc>
                 <a:spcPct val="110000"/>
               </a:lnSpc>
               <a:buNone/>
-              <a:defRPr sz="2800" b="0">
-                <a:solidFill>
-                  <a:srgbClr val="303437"/>
-                </a:solidFill>
-                <a:latin typeface="Noto Sans"/>
-              </a:defRPr>
-            </a:pPr>
-            <a:r>
-              <a:rPr sz="2800" b="1" lang="ja-JP" altLang="en-US">
-                <a:solidFill>
-                  <a:srgbClr val="303437"/>
-                </a:solidFill>
-                <a:latin typeface="Noto Sans"/>
-                <a:ea typeface="Noto Sans CJK JP"/>
-                <a:cs typeface="Noto Sans"/>
-              </a:rPr>
-              <a:t>短いレビューで、少数例学習の力を測る</a:t>
-            </a:r>
-          </a:p>
-        </p:txBody>
-      </p:sp>
-      <p:sp>
-        <p:nvSpPr>
-          <p:cNvPr id="3" name="Text Placeholder 2"/>
-          <p:cNvSpPr>
-            <a:spLocks noGrp="1"/>
-          </p:cNvSpPr>
-          <p:nvPr>
-            <p:ph type="body" idx="1"/>
-          </p:nvPr>
-        </p:nvSpPr>
-        <p:spPr>
-          <a:xfrm>
-            <a:off x="594360" y="1463040"/>
-            <a:ext cx="7955279" cy="3044952"/>
-          </a:xfrm>
-        </p:spPr>
-        <p:txBody>
-          <a:bodyPr wrap="square" tIns="91440" bIns="91440">
-            <a:noAutofit/>
-          </a:bodyPr>
-          <a:lstStyle/>
-          <a:p>
-            <a:pPr marL="457200" indent="-355600">
-              <a:lnSpc>
-                <a:spcPts val="2499"/>
-              </a:lnSpc>
-              <a:spcAft>
-                <a:spcPts val="700"/>
-              </a:spcAft>
-              <a:buSzPct val="63333"/>
-              <a:buFont typeface="Noto Sans CJK JP"/>
-              <a:buChar char="●"/>
-              <a:defRPr sz="2100" b="0">
-                <a:solidFill>
-                  <a:srgbClr val="303437"/>
-                </a:solidFill>
-                <a:latin typeface="Noto Sans"/>
-              </a:defRPr>
-            </a:pPr>
-            <a:r>
-              <a:rPr sz="2100" b="0" lang="ja-JP" altLang="en-US">
-                <a:solidFill>
-                  <a:srgbClr val="303437"/>
-                </a:solidFill>
-                <a:latin typeface="Noto Sans"/>
-                <a:ea typeface="Noto Sans CJK JP"/>
-                <a:cs typeface="Noto Sans"/>
-              </a:rPr>
-              <a:t>EPRSTMTは、中国語の商品レビューを肯定的・否定的に分類するデータセット。32件ずつの小さな学習セットで、少数例から学ぶ方法を評価する。</a:t>
-            </a:r>
-          </a:p>
-          <a:p>
-            <a:pPr marL="457200" indent="-355600">
-              <a:lnSpc>
-                <a:spcPts val="2499"/>
-              </a:lnSpc>
-              <a:spcAft>
-                <a:spcPts val="700"/>
-              </a:spcAft>
-              <a:buSzPct val="63333"/>
-              <a:buFont typeface="Noto Sans CJK JP"/>
-              <a:buChar char="●"/>
-              <a:defRPr sz="2100" b="0">
-                <a:solidFill>
-                  <a:srgbClr val="303437"/>
-                </a:solidFill>
-                <a:latin typeface="Noto Sans"/>
-              </a:defRPr>
-            </a:pPr>
-            <a:r>
-              <a:rPr sz="2100" b="0" lang="ja-JP" altLang="en-US">
-                <a:solidFill>
-                  <a:srgbClr val="303437"/>
-                </a:solidFill>
-                <a:latin typeface="Noto Sans"/>
-                <a:ea typeface="Noto Sans CJK JP"/>
-                <a:cs typeface="Noto Sans"/>
-              </a:rPr>
-              <a:t>短い文章にも、複数の評価や皮肉が含まれる。良い点と不満の両方があるレビューや、文章の印象とラベルが合いにくい例が、分類の難しさを表している。</a:t>
-            </a:r>
-          </a:p>
-          <a:p>
-            <a:pPr marL="457200" indent="-355600">
-              <a:lnSpc>
-                <a:spcPts val="2499"/>
-              </a:lnSpc>
-              <a:spcAft>
-                <a:spcPts val="0"/>
-              </a:spcAft>
-              <a:buSzPct val="63333"/>
-              <a:buFont typeface="Noto Sans CJK JP"/>
-              <a:buChar char="●"/>
-              <a:defRPr sz="2100" b="0">
-                <a:solidFill>
-                  <a:srgbClr val="303437"/>
-                </a:solidFill>
-                <a:latin typeface="Noto Sans"/>
-              </a:defRPr>
-            </a:pPr>
-            <a:r>
-              <a:rPr sz="2100" b="0" lang="ja-JP" altLang="en-US">
-                <a:solidFill>
-                  <a:srgbClr val="303437"/>
-                </a:solidFill>
-                <a:latin typeface="Noto Sans"/>
-                <a:ea typeface="Noto Sans CJK JP"/>
-                <a:cs typeface="Noto Sans"/>
-              </a:rPr>
-              <a:t>FewCLUEで少数例学習に使われ、CLEVAでは選択式の感情分析にも利用されている。</a:t>
-            </a:r>
-          </a:p>
-        </p:txBody>
-      </p:sp>
-      <p:sp>
-        <p:nvSpPr>
-          <p:cNvPr id="4" name="Title 3"/>
+              <a:defRPr sz="3600" b="0">
+                <a:solidFill>
+                  <a:srgbClr val="303437"/>
+                </a:solidFill>
+                <a:latin typeface="Noto Sans"/>
+              </a:defRPr>
+            </a:pPr>
+            <a:r>
+              <a:rPr sz="3600" b="1" lang="ja-JP" altLang="en-US">
+                <a:solidFill>
+                  <a:srgbClr val="303437"/>
+                </a:solidFill>
+                <a:latin typeface="Noto Sans"/>
+                <a:ea typeface="Noto Sans CJK JP"/>
+                <a:cs typeface="Noto Sans"/>
+              </a:rPr>
+              <a:t>Appendix</a:t>
+            </a:r>
+          </a:p>
+        </p:txBody>
+      </p:sp>
+      <p:sp>
+        <p:nvSpPr>
+          <p:cNvPr id="3" name="Title 2"/>
           <p:cNvSpPr>
             <a:spLocks noGrp="1"/>
           </p:cNvSpPr>
@@ -13501,84 +12827,7 @@
                 <a:ea typeface="Noto Sans CJK JP"/>
                 <a:cs typeface="Noto Sans"/>
               </a:rPr>
-              <a:t>4. CLEVAでの利用と入手方法</a:t>
-            </a:r>
-          </a:p>
-        </p:txBody>
-      </p:sp>
-      <p:sp>
-        <p:nvSpPr>
-          <p:cNvPr id="5" name="sources"/>
-          <p:cNvSpPr txBox="1"/>
-          <p:nvPr/>
-        </p:nvSpPr>
-        <p:spPr>
-          <a:xfrm>
-            <a:off x="502920" y="4700016"/>
-            <a:ext cx="8183879" cy="530352"/>
-          </a:xfrm>
-          <a:prstGeom prst="rect">
-            <a:avLst/>
-          </a:prstGeom>
-          <a:noFill/>
-        </p:spPr>
-        <p:txBody>
-          <a:bodyPr wrap="square" lIns="0" rIns="0" tIns="0" bIns="0">
-            <a:noAutofit/>
-          </a:bodyPr>
-          <a:lstStyle/>
-          <a:p>
-            <a:pPr algn="l">
-              <a:lnSpc>
-                <a:spcPts val="940"/>
-              </a:lnSpc>
-              <a:spcBef>
-                <a:spcPts val="0"/>
-              </a:spcBef>
-              <a:spcAft>
-                <a:spcPts val="140"/>
-              </a:spcAft>
-              <a:buNone/>
-              <a:defRPr sz="810" b="0">
-                <a:solidFill>
-                  <a:srgbClr val="303437"/>
-                </a:solidFill>
-                <a:latin typeface="Noto Sans"/>
-              </a:defRPr>
-            </a:pPr>
-            <a:r>
-              <a:rPr sz="810" b="0" lang="ja-JP" altLang="en-US">
-                <a:solidFill>
-                  <a:srgbClr val="626669"/>
-                </a:solidFill>
-                <a:latin typeface="Noto Sans"/>
-                <a:ea typeface="Noto Sans CJK JP"/>
-                <a:cs typeface="Noto Sans"/>
-              </a:rPr>
-              <a:t>[1] Xu et al. (2021). FewCLUE: A Chinese Few-shot Learning Evaluation Benchmark. arXiv.</a:t>
-            </a:r>
-            <a:r>
-              <a:rPr sz="810" b="0" lang="ja-JP" altLang="en-US">
-                <a:solidFill>
-                  <a:srgbClr val="626669"/>
-                </a:solidFill>
-                <a:latin typeface="Noto Sans"/>
-                <a:ea typeface="Noto Sans CJK JP"/>
-                <a:cs typeface="Noto Sans"/>
-              </a:rPr>
-              <a:t>  </a:t>
-            </a:r>
-            <a:r>
-              <a:rPr sz="810" b="0" lang="ja-JP" altLang="en-US">
-                <a:solidFill>
-                  <a:srgbClr val="626669"/>
-                </a:solidFill>
-                <a:latin typeface="Noto Sans"/>
-                <a:ea typeface="Noto Sans CJK JP"/>
-                <a:cs typeface="Noto Sans"/>
-                <a:hlinkClick r:id="rId2"/>
-              </a:rPr>
-              <a:t>https://arxiv.org/abs/2107.07498</a:t>
+              <a:t>Appendix</a:t>
             </a:r>
           </a:p>
         </p:txBody>
@@ -13613,45 +12862,128 @@
         </p:nvSpPr>
         <p:spPr>
           <a:xfrm>
-            <a:off x="548640" y="2484835"/>
-            <a:ext cx="8046720" cy="686816"/>
-          </a:xfrm>
-        </p:spPr>
-        <p:txBody>
-          <a:bodyPr wrap="square" lIns="0" rIns="0" tIns="0" bIns="101600" anchor="ctr">
+            <a:off x="468172" y="650138"/>
+            <a:ext cx="8206740" cy="616305"/>
+          </a:xfrm>
+        </p:spPr>
+        <p:txBody>
+          <a:bodyPr wrap="square" lIns="0" rIns="0" tIns="0" bIns="0">
             <a:noAutofit/>
           </a:bodyPr>
           <a:lstStyle/>
           <a:p>
-            <a:pPr algn="ctr">
+            <a:pPr algn="l">
               <a:lnSpc>
                 <a:spcPct val="110000"/>
               </a:lnSpc>
               <a:buNone/>
-              <a:defRPr sz="3600" b="0">
-                <a:solidFill>
-                  <a:srgbClr val="303437"/>
-                </a:solidFill>
-                <a:latin typeface="Noto Sans"/>
-              </a:defRPr>
-            </a:pPr>
-            <a:r>
-              <a:rPr sz="3600" b="1" lang="ja-JP" altLang="en-US">
-                <a:solidFill>
-                  <a:srgbClr val="303437"/>
-                </a:solidFill>
-                <a:latin typeface="Noto Sans"/>
-                <a:ea typeface="Noto Sans CJK JP"/>
-                <a:cs typeface="Noto Sans"/>
-              </a:rPr>
-              <a:t>Appendix</a:t>
-            </a:r>
-          </a:p>
-        </p:txBody>
-      </p:sp>
-      <p:sp>
-        <p:nvSpPr>
-          <p:cNvPr id="3" name="Title 2"/>
+              <a:defRPr sz="2800" b="0">
+                <a:solidFill>
+                  <a:srgbClr val="303437"/>
+                </a:solidFill>
+                <a:latin typeface="Noto Sans"/>
+              </a:defRPr>
+            </a:pPr>
+            <a:r>
+              <a:rPr sz="2800" b="1" lang="ja-JP" altLang="en-US">
+                <a:solidFill>
+                  <a:srgbClr val="303437"/>
+                </a:solidFill>
+                <a:latin typeface="Noto Sans"/>
+                <a:ea typeface="Noto Sans CJK JP"/>
+                <a:cs typeface="Noto Sans"/>
+              </a:rPr>
+              <a:t/>
+            </a:r>
+          </a:p>
+        </p:txBody>
+      </p:sp>
+      <p:sp>
+        <p:nvSpPr>
+          <p:cNvPr id="3" name="Text Placeholder 2"/>
+          <p:cNvSpPr>
+            <a:spLocks noGrp="1"/>
+          </p:cNvSpPr>
+          <p:nvPr>
+            <p:ph type="body" idx="1"/>
+          </p:nvPr>
+        </p:nvSpPr>
+        <p:spPr>
+          <a:xfrm>
+            <a:off x="640080" y="2281121"/>
+            <a:ext cx="7863840" cy="1127760"/>
+          </a:xfrm>
+        </p:spPr>
+        <p:txBody>
+          <a:bodyPr lIns="0" rIns="0" tIns="0" bIns="0">
+            <a:noAutofit/>
+          </a:bodyPr>
+          <a:lstStyle/>
+          <a:p>
+            <a:pPr marL="457200" indent="-457200">
+              <a:lnSpc>
+                <a:spcPts val="3660"/>
+              </a:lnSpc>
+              <a:spcAft>
+                <a:spcPts val="1200"/>
+              </a:spcAft>
+              <a:buSzPct val="100000"/>
+              <a:buFont typeface="Noto Sans CJK JP"/>
+              <a:buAutoNum type="arabicPeriod" startAt="1"/>
+              <a:defRPr sz="3000" b="1">
+                <a:solidFill>
+                  <a:srgbClr val="303437"/>
+                </a:solidFill>
+                <a:latin typeface="Noto Sans"/>
+              </a:defRPr>
+            </a:pPr>
+            <a:r>
+              <a:rPr sz="3000" b="1" lang="ja-JP" altLang="en-US">
+                <a:solidFill>
+                  <a:srgbClr val="303437"/>
+                </a:solidFill>
+                <a:latin typeface="Noto Sans"/>
+                <a:ea typeface="Noto Sans CJK JP"/>
+                <a:cs typeface="Noto Sans"/>
+              </a:rPr>
+              <a:t>追加の商品レビュー</a:t>
+            </a:r>
+          </a:p>
+          <a:p>
+            <a:pPr marL="457200" indent="-457200">
+              <a:lnSpc>
+                <a:spcPts val="3660"/>
+              </a:lnSpc>
+              <a:spcAft>
+                <a:spcPts val="0"/>
+              </a:spcAft>
+              <a:buSzPct val="100000"/>
+              <a:buFont typeface="Noto Sans CJK JP"/>
+              <a:buAutoNum type="arabicPeriod" startAt="2"/>
+              <a:defRPr sz="3000" b="1">
+                <a:solidFill>
+                  <a:srgbClr val="303437"/>
+                </a:solidFill>
+                <a:latin typeface="Noto Sans"/>
+              </a:defRPr>
+            </a:pPr>
+            <a:r>
+              <a:rPr sz="3000" b="1" lang="ja-JP" altLang="en-US">
+                <a:solidFill>
+                  <a:srgbClr val="303437"/>
+                </a:solidFill>
+                <a:latin typeface="Noto Sans"/>
+                <a:ea typeface="Noto Sans CJK JP"/>
+                <a:cs typeface="Noto Sans"/>
+              </a:rPr>
+              <a:t>学習方式の比較と参考文献</a:t>
+            </a:r>
+          </a:p>
+        </p:txBody>
+      </p:sp>
+      <p:sp>
+        <p:nvSpPr>
+          <p:cNvPr id="4" name="Title 3"/>
           <p:cNvSpPr>
             <a:spLocks noGrp="1"/>
           </p:cNvSpPr>
@@ -13692,7 +13024,7 @@
                 <a:ea typeface="Noto Sans CJK JP"/>
                 <a:cs typeface="Noto Sans"/>
               </a:rPr>
-              <a:t>Appendix</a:t>
+              <a:t>Appendix: 目次</a:t>
             </a:r>
           </a:p>
         </p:txBody>
@@ -13727,83 +13059,30 @@
         </p:nvSpPr>
         <p:spPr>
           <a:xfrm>
-            <a:off x="468172" y="650138"/>
-            <a:ext cx="8206740" cy="616305"/>
-          </a:xfrm>
-        </p:spPr>
-        <p:txBody>
-          <a:bodyPr wrap="square" lIns="0" rIns="0" tIns="0" bIns="0">
+            <a:off x="548640" y="2506875"/>
+            <a:ext cx="8046720" cy="585216"/>
+          </a:xfrm>
+        </p:spPr>
+        <p:txBody>
+          <a:bodyPr wrap="square" lIns="0" rIns="0" tIns="0" bIns="0" anchor="ctr">
             <a:noAutofit/>
           </a:bodyPr>
           <a:lstStyle/>
           <a:p>
-            <a:pPr algn="l">
+            <a:pPr algn="ctr">
               <a:lnSpc>
                 <a:spcPct val="110000"/>
               </a:lnSpc>
               <a:buNone/>
-              <a:defRPr sz="2800" b="0">
-                <a:solidFill>
-                  <a:srgbClr val="303437"/>
-                </a:solidFill>
-                <a:latin typeface="Noto Sans"/>
-              </a:defRPr>
-            </a:pPr>
-            <a:r>
-              <a:rPr sz="2800" b="1" lang="ja-JP" altLang="en-US">
-                <a:solidFill>
-                  <a:srgbClr val="303437"/>
-                </a:solidFill>
-                <a:latin typeface="Noto Sans"/>
-                <a:ea typeface="Noto Sans CJK JP"/>
-                <a:cs typeface="Noto Sans"/>
-              </a:rPr>
-              <a:t/>
-            </a:r>
-          </a:p>
-        </p:txBody>
-      </p:sp>
-      <p:sp>
-        <p:nvSpPr>
-          <p:cNvPr id="3" name="Text Placeholder 2"/>
-          <p:cNvSpPr>
-            <a:spLocks noGrp="1"/>
-          </p:cNvSpPr>
-          <p:nvPr>
-            <p:ph type="body" idx="1"/>
-          </p:nvPr>
-        </p:nvSpPr>
-        <p:spPr>
-          <a:xfrm>
-            <a:off x="640080" y="2281121"/>
-            <a:ext cx="7863840" cy="1127760"/>
-          </a:xfrm>
-        </p:spPr>
-        <p:txBody>
-          <a:bodyPr lIns="0" rIns="0" tIns="0" bIns="0">
-            <a:noAutofit/>
-          </a:bodyPr>
-          <a:lstStyle/>
-          <a:p>
-            <a:pPr marL="457200" indent="-457200">
-              <a:lnSpc>
-                <a:spcPts val="3660"/>
-              </a:lnSpc>
-              <a:spcAft>
-                <a:spcPts val="1200"/>
-              </a:spcAft>
-              <a:buSzPct val="100000"/>
-              <a:buFont typeface="Noto Sans CJK JP"/>
-              <a:buAutoNum type="arabicPeriod" startAt="1"/>
-              <a:defRPr sz="3000" b="1">
-                <a:solidFill>
-                  <a:srgbClr val="303437"/>
-                </a:solidFill>
-                <a:latin typeface="Noto Sans"/>
-              </a:defRPr>
-            </a:pPr>
-            <a:r>
-              <a:rPr sz="3000" b="1" lang="ja-JP" altLang="en-US">
+              <a:defRPr sz="3600" b="0">
+                <a:solidFill>
+                  <a:srgbClr val="303437"/>
+                </a:solidFill>
+                <a:latin typeface="Noto Sans"/>
+              </a:defRPr>
+            </a:pPr>
+            <a:r>
+              <a:rPr sz="3600" b="1" lang="ja-JP" altLang="en-US">
                 <a:solidFill>
                   <a:srgbClr val="303437"/>
                 </a:solidFill>
@@ -13814,41 +13093,11 @@
               <a:t>追加の商品レビュー</a:t>
             </a:r>
           </a:p>
-          <a:p>
-            <a:pPr marL="457200" indent="-457200">
-              <a:lnSpc>
-                <a:spcPts val="3660"/>
-              </a:lnSpc>
-              <a:spcAft>
-                <a:spcPts val="0"/>
-              </a:spcAft>
-              <a:buSzPct val="100000"/>
-              <a:buFont typeface="Noto Sans CJK JP"/>
-              <a:buAutoNum type="arabicPeriod" startAt="2"/>
-              <a:defRPr sz="3000" b="1">
-                <a:solidFill>
-                  <a:srgbClr val="303437"/>
-                </a:solidFill>
-                <a:latin typeface="Noto Sans"/>
-              </a:defRPr>
-            </a:pPr>
-            <a:r>
-              <a:rPr sz="3000" b="1" lang="ja-JP" altLang="en-US">
-                <a:solidFill>
-                  <a:srgbClr val="303437"/>
-                </a:solidFill>
-                <a:latin typeface="Noto Sans"/>
-                <a:ea typeface="Noto Sans CJK JP"/>
-                <a:cs typeface="Noto Sans"/>
-              </a:rPr>
-              <a:t>学習方式の比較と参考文献</a:t>
-            </a:r>
-          </a:p>
-        </p:txBody>
-      </p:sp>
-      <p:sp>
-        <p:nvSpPr>
-          <p:cNvPr id="4" name="Title 3"/>
+        </p:txBody>
+      </p:sp>
+      <p:sp>
+        <p:nvSpPr>
+          <p:cNvPr id="3" name="Title 2"/>
           <p:cNvSpPr>
             <a:spLocks noGrp="1"/>
           </p:cNvSpPr>
@@ -13889,7 +13138,7 @@
                 <a:ea typeface="Noto Sans CJK JP"/>
                 <a:cs typeface="Noto Sans"/>
               </a:rPr>
-              <a:t>Appendix: 目次</a:t>
+              <a:t>Appendix: 1. 追加の商品レビュー</a:t>
             </a:r>
           </a:p>
         </p:txBody>
@@ -13924,38 +13173,38 @@
         </p:nvSpPr>
         <p:spPr>
           <a:xfrm>
-            <a:off x="548640" y="2506875"/>
-            <a:ext cx="8046720" cy="585216"/>
-          </a:xfrm>
-        </p:spPr>
-        <p:txBody>
-          <a:bodyPr wrap="square" lIns="0" rIns="0" tIns="0" bIns="0" anchor="ctr">
+            <a:off x="468172" y="650138"/>
+            <a:ext cx="8206740" cy="616305"/>
+          </a:xfrm>
+        </p:spPr>
+        <p:txBody>
+          <a:bodyPr wrap="square" lIns="0" rIns="0" tIns="0" bIns="0">
             <a:noAutofit/>
           </a:bodyPr>
           <a:lstStyle/>
           <a:p>
-            <a:pPr algn="ctr">
+            <a:pPr algn="l">
               <a:lnSpc>
                 <a:spcPct val="110000"/>
               </a:lnSpc>
               <a:buNone/>
-              <a:defRPr sz="3600" b="0">
-                <a:solidFill>
-                  <a:srgbClr val="303437"/>
-                </a:solidFill>
-                <a:latin typeface="Noto Sans"/>
-              </a:defRPr>
-            </a:pPr>
-            <a:r>
-              <a:rPr sz="3600" b="1" lang="ja-JP" altLang="en-US">
-                <a:solidFill>
-                  <a:srgbClr val="303437"/>
-                </a:solidFill>
-                <a:latin typeface="Noto Sans"/>
-                <a:ea typeface="Noto Sans CJK JP"/>
-                <a:cs typeface="Noto Sans"/>
-              </a:rPr>
-              <a:t>追加の商品レビュー</a:t>
+              <a:defRPr sz="2800" b="0">
+                <a:solidFill>
+                  <a:srgbClr val="303437"/>
+                </a:solidFill>
+                <a:latin typeface="Noto Sans"/>
+              </a:defRPr>
+            </a:pPr>
+            <a:r>
+              <a:rPr sz="2800" b="1" lang="ja-JP" altLang="en-US">
+                <a:solidFill>
+                  <a:srgbClr val="303437"/>
+                </a:solidFill>
+                <a:latin typeface="Noto Sans"/>
+                <a:ea typeface="Noto Sans CJK JP"/>
+                <a:cs typeface="Noto Sans"/>
+              </a:rPr>
+              <a:t>実例4：配送への皮肉を読む</a:t>
             </a:r>
           </a:p>
         </p:txBody>
@@ -14004,6 +13253,393 @@
                 <a:cs typeface="Noto Sans"/>
               </a:rPr>
               <a:t>Appendix: 1. 追加の商品レビュー</a:t>
+            </a:r>
+          </a:p>
+        </p:txBody>
+      </p:sp>
+      <p:sp>
+        <p:nvSpPr>
+          <p:cNvPr id="4" name="TextBox 3"/>
+          <p:cNvSpPr txBox="1"/>
+          <p:nvPr/>
+        </p:nvSpPr>
+        <p:spPr>
+          <a:xfrm>
+            <a:off x="548640" y="1554480"/>
+            <a:ext cx="3840480" cy="228600"/>
+          </a:xfrm>
+          <a:prstGeom prst="rect">
+            <a:avLst/>
+          </a:prstGeom>
+          <a:noFill/>
+        </p:spPr>
+        <p:txBody>
+          <a:bodyPr wrap="square" lIns="0" rIns="0" tIns="0" bIns="0">
+            <a:noAutofit/>
+          </a:bodyPr>
+          <a:lstStyle/>
+          <a:p>
+            <a:pPr algn="l">
+              <a:lnSpc>
+                <a:spcPts val="1404"/>
+              </a:lnSpc>
+              <a:spcBef>
+                <a:spcPts val="0"/>
+              </a:spcBef>
+              <a:spcAft>
+                <a:spcPts val="0"/>
+              </a:spcAft>
+              <a:buNone/>
+              <a:defRPr sz="1200" b="0">
+                <a:solidFill>
+                  <a:srgbClr val="303437"/>
+                </a:solidFill>
+                <a:latin typeface="Noto Sans"/>
+              </a:defRPr>
+            </a:pPr>
+            <a:r>
+              <a:rPr sz="1200" b="0" lang="ja-JP" altLang="en-US">
+                <a:solidFill>
+                  <a:srgbClr val="626669"/>
+                </a:solidFill>
+                <a:latin typeface="Noto Sans"/>
+                <a:ea typeface="Noto Sans CJK JP"/>
+                <a:cs typeface="Noto Sans"/>
+              </a:rPr>
+              <a:t>中国語原文（全文）</a:t>
+            </a:r>
+          </a:p>
+        </p:txBody>
+      </p:sp>
+      <p:sp>
+        <p:nvSpPr>
+          <p:cNvPr id="5" name="TextBox 4"/>
+          <p:cNvSpPr txBox="1"/>
+          <p:nvPr/>
+        </p:nvSpPr>
+        <p:spPr>
+          <a:xfrm>
+            <a:off x="4617720" y="1554480"/>
+            <a:ext cx="3931920" cy="228600"/>
+          </a:xfrm>
+          <a:prstGeom prst="rect">
+            <a:avLst/>
+          </a:prstGeom>
+          <a:noFill/>
+        </p:spPr>
+        <p:txBody>
+          <a:bodyPr wrap="square" lIns="0" rIns="0" tIns="0" bIns="0">
+            <a:noAutofit/>
+          </a:bodyPr>
+          <a:lstStyle/>
+          <a:p>
+            <a:pPr algn="l">
+              <a:lnSpc>
+                <a:spcPts val="1404"/>
+              </a:lnSpc>
+              <a:spcBef>
+                <a:spcPts val="0"/>
+              </a:spcBef>
+              <a:spcAft>
+                <a:spcPts val="0"/>
+              </a:spcAft>
+              <a:buNone/>
+              <a:defRPr sz="1200" b="0">
+                <a:solidFill>
+                  <a:srgbClr val="303437"/>
+                </a:solidFill>
+                <a:latin typeface="Noto Sans"/>
+              </a:defRPr>
+            </a:pPr>
+            <a:r>
+              <a:rPr sz="1200" b="0" lang="ja-JP" altLang="en-US">
+                <a:solidFill>
+                  <a:srgbClr val="626669"/>
+                </a:solidFill>
+                <a:latin typeface="Noto Sans"/>
+                <a:ea typeface="Noto Sans CJK JP"/>
+                <a:cs typeface="Noto Sans"/>
+              </a:rPr>
+              <a:t>日本語訳</a:t>
+            </a:r>
+          </a:p>
+        </p:txBody>
+      </p:sp>
+      <p:sp>
+        <p:nvSpPr>
+          <p:cNvPr id="6" name="quote-frame"/>
+          <p:cNvSpPr/>
+          <p:nvPr/>
+        </p:nvSpPr>
+        <p:spPr>
+          <a:xfrm>
+            <a:off x="548640" y="1783080"/>
+            <a:ext cx="3840480" cy="711200"/>
+          </a:xfrm>
+          <a:prstGeom prst="rect">
+            <a:avLst/>
+          </a:prstGeom>
+          <a:solidFill>
+            <a:srgbClr val="EBEDEB"/>
+          </a:solidFill>
+          <a:ln>
+            <a:noFill/>
+          </a:ln>
+          <a:effectLst/>
+        </p:spPr>
+        <p:style>
+          <a:lnRef idx="1">
+            <a:schemeClr val="accent1"/>
+          </a:lnRef>
+          <a:fillRef idx="3">
+            <a:schemeClr val="accent1"/>
+          </a:fillRef>
+          <a:effectRef idx="0">
+            <a:schemeClr val="accent1"/>
+          </a:effectRef>
+          <a:fontRef idx="minor">
+            <a:schemeClr val="lt1"/>
+          </a:fontRef>
+        </p:style>
+        <p:txBody>
+          <a:bodyPr rtlCol="0" anchor="t" wrap="square" lIns="177800" rIns="177800" tIns="68580" bIns="127000">
+            <a:noAutofit/>
+          </a:bodyPr>
+          <a:lstStyle/>
+          <a:p>
+            <a:pPr algn="l">
+              <a:lnSpc>
+                <a:spcPts val="2261"/>
+              </a:lnSpc>
+              <a:spcBef>
+                <a:spcPts val="0"/>
+              </a:spcBef>
+              <a:spcAft>
+                <a:spcPts val="0"/>
+              </a:spcAft>
+              <a:buNone/>
+              <a:defRPr sz="1900" b="0">
+                <a:solidFill>
+                  <a:srgbClr val="303437"/>
+                </a:solidFill>
+                <a:latin typeface="Noto Sans"/>
+              </a:defRPr>
+            </a:pPr>
+            <a:r>
+              <a:rPr sz="1900" b="0" lang="ja-JP" altLang="en-US">
+                <a:solidFill>
+                  <a:srgbClr val="303437"/>
+                </a:solidFill>
+                <a:latin typeface="Noto Sans"/>
+                <a:ea typeface="Noto Sans CJK JP"/>
+                <a:cs typeface="Noto Sans"/>
+              </a:rPr>
+              <a:t>呵呵了 这物流速度也是没谁了 同城网购竟然三天了还不到</a:t>
+            </a:r>
+          </a:p>
+        </p:txBody>
+      </p:sp>
+      <p:sp>
+        <p:nvSpPr>
+          <p:cNvPr id="7" name="quote-frame"/>
+          <p:cNvSpPr/>
+          <p:nvPr/>
+        </p:nvSpPr>
+        <p:spPr>
+          <a:xfrm>
+            <a:off x="4617720" y="1783080"/>
+            <a:ext cx="3931920" cy="1286933"/>
+          </a:xfrm>
+          <a:prstGeom prst="rect">
+            <a:avLst/>
+          </a:prstGeom>
+          <a:solidFill>
+            <a:srgbClr val="EBEDEB"/>
+          </a:solidFill>
+          <a:ln>
+            <a:noFill/>
+          </a:ln>
+          <a:effectLst/>
+        </p:spPr>
+        <p:style>
+          <a:lnRef idx="1">
+            <a:schemeClr val="accent1"/>
+          </a:lnRef>
+          <a:fillRef idx="3">
+            <a:schemeClr val="accent1"/>
+          </a:fillRef>
+          <a:effectRef idx="0">
+            <a:schemeClr val="accent1"/>
+          </a:effectRef>
+          <a:fontRef idx="minor">
+            <a:schemeClr val="lt1"/>
+          </a:fontRef>
+        </p:style>
+        <p:txBody>
+          <a:bodyPr rtlCol="0" anchor="t" wrap="square" lIns="177800" rIns="177800" tIns="68580" bIns="127000">
+            <a:noAutofit/>
+          </a:bodyPr>
+          <a:lstStyle/>
+          <a:p>
+            <a:pPr algn="l">
+              <a:lnSpc>
+                <a:spcPts val="2261"/>
+              </a:lnSpc>
+              <a:spcBef>
+                <a:spcPts val="0"/>
+              </a:spcBef>
+              <a:spcAft>
+                <a:spcPts val="0"/>
+              </a:spcAft>
+              <a:buNone/>
+              <a:defRPr sz="1900" b="0">
+                <a:solidFill>
+                  <a:srgbClr val="303437"/>
+                </a:solidFill>
+                <a:latin typeface="Noto Sans"/>
+              </a:defRPr>
+            </a:pPr>
+            <a:r>
+              <a:rPr sz="1900" b="0" lang="ja-JP" altLang="en-US">
+                <a:solidFill>
+                  <a:srgbClr val="303437"/>
+                </a:solidFill>
+                <a:latin typeface="Noto Sans"/>
+                <a:ea typeface="Noto Sans CJK JP"/>
+                <a:cs typeface="Noto Sans"/>
+              </a:rPr>
+              <a:t>いやあ、この配送の遅さにはあきれます。同じ市内なのに、ネットで注文してから3日たっても届きません。</a:t>
+            </a:r>
+          </a:p>
+        </p:txBody>
+      </p:sp>
+      <p:sp>
+        <p:nvSpPr>
+          <p:cNvPr id="8" name="answer"/>
+          <p:cNvSpPr txBox="1"/>
+          <p:nvPr/>
+        </p:nvSpPr>
+        <p:spPr>
+          <a:xfrm>
+            <a:off x="585216" y="3331972"/>
+            <a:ext cx="7955279" cy="393192"/>
+          </a:xfrm>
+          <a:prstGeom prst="rect">
+            <a:avLst/>
+          </a:prstGeom>
+          <a:noFill/>
+        </p:spPr>
+        <p:txBody>
+          <a:bodyPr wrap="square" lIns="0" rIns="0" tIns="0" bIns="0">
+            <a:noAutofit/>
+          </a:bodyPr>
+          <a:lstStyle/>
+          <a:p>
+            <a:pPr algn="l">
+              <a:lnSpc>
+                <a:spcPts val="2457"/>
+              </a:lnSpc>
+              <a:spcBef>
+                <a:spcPts val="0"/>
+              </a:spcBef>
+              <a:spcAft>
+                <a:spcPts val="0"/>
+              </a:spcAft>
+              <a:buNone/>
+              <a:defRPr sz="2100" b="0">
+                <a:solidFill>
+                  <a:srgbClr val="303437"/>
+                </a:solidFill>
+                <a:latin typeface="Noto Sans"/>
+              </a:defRPr>
+            </a:pPr>
+            <a:r>
+              <a:rPr sz="2100" b="1" lang="ja-JP" altLang="en-US">
+                <a:solidFill>
+                  <a:srgbClr val="B13731"/>
+                </a:solidFill>
+                <a:latin typeface="Noto Sans"/>
+                <a:ea typeface="Noto Sans CJK JP"/>
+                <a:cs typeface="Noto Sans"/>
+              </a:rPr>
+              <a:t>正解：否定的 / Negative</a:t>
+            </a:r>
+          </a:p>
+        </p:txBody>
+      </p:sp>
+      <p:sp>
+        <p:nvSpPr>
+          <p:cNvPr id="9" name="sources"/>
+          <p:cNvSpPr txBox="1"/>
+          <p:nvPr/>
+        </p:nvSpPr>
+        <p:spPr>
+          <a:xfrm>
+            <a:off x="502920" y="4700016"/>
+            <a:ext cx="8183879" cy="530352"/>
+          </a:xfrm>
+          <a:prstGeom prst="rect">
+            <a:avLst/>
+          </a:prstGeom>
+          <a:noFill/>
+        </p:spPr>
+        <p:txBody>
+          <a:bodyPr wrap="square" lIns="0" rIns="0" tIns="0" bIns="0">
+            <a:noAutofit/>
+          </a:bodyPr>
+          <a:lstStyle/>
+          <a:p>
+            <a:pPr algn="l">
+              <a:lnSpc>
+                <a:spcPts val="940"/>
+              </a:lnSpc>
+              <a:spcBef>
+                <a:spcPts val="0"/>
+              </a:spcBef>
+              <a:spcAft>
+                <a:spcPts val="140"/>
+              </a:spcAft>
+              <a:buNone/>
+              <a:defRPr sz="810" b="0">
+                <a:solidFill>
+                  <a:srgbClr val="303437"/>
+                </a:solidFill>
+                <a:latin typeface="Noto Sans"/>
+              </a:defRPr>
+            </a:pPr>
+            <a:r>
+              <a:rPr sz="810" b="0" lang="ja-JP" altLang="en-US">
+                <a:solidFill>
+                  <a:srgbClr val="626669"/>
+                </a:solidFill>
+                <a:latin typeface="Noto Sans"/>
+                <a:ea typeface="Noto Sans CJK JP"/>
+                <a:cs typeface="Noto Sans"/>
+              </a:rPr>
+              <a:t>[1] CLUE team (n.d.). FewCLUE — EPRSTMT. test_public.json.</a:t>
+            </a:r>
+            <a:r>
+              <a:rPr sz="810" b="0" lang="ja-JP" altLang="en-US">
+                <a:solidFill>
+                  <a:srgbClr val="626669"/>
+                </a:solidFill>
+                <a:latin typeface="Noto Sans"/>
+                <a:ea typeface="Noto Sans CJK JP"/>
+                <a:cs typeface="Noto Sans"/>
+              </a:rPr>
+              <a:t>  </a:t>
+            </a:r>
+            <a:r>
+              <a:rPr sz="810" b="0" lang="ja-JP" altLang="en-US">
+                <a:solidFill>
+                  <a:srgbClr val="626669"/>
+                </a:solidFill>
+                <a:latin typeface="Noto Sans"/>
+                <a:ea typeface="Noto Sans CJK JP"/>
+                <a:cs typeface="Noto Sans"/>
+                <a:hlinkClick r:id="rId2"/>
+              </a:rPr>
+              <a:t>https://github.com/CLUEbenchmark/FewCLUE/blob/main/datasets/eprstmt/test_public.json</a:t>
             </a:r>
           </a:p>
         </p:txBody>
@@ -14069,7 +13705,7 @@
                 <a:ea typeface="Noto Sans CJK JP"/>
                 <a:cs typeface="Noto Sans"/>
               </a:rPr>
-              <a:t>実例4：配送への皮肉を読む</a:t>
+              <a:t>実例5：短い肯定と、今後の試用</a:t>
             </a:r>
           </a:p>
         </p:txBody>
@@ -14239,7 +13875,7 @@
         <p:spPr>
           <a:xfrm>
             <a:off x="548640" y="1783080"/>
-            <a:ext cx="3840480" cy="711200"/>
+            <a:ext cx="3840480" cy="431800"/>
           </a:xfrm>
           <a:prstGeom prst="rect">
             <a:avLst/>
@@ -14299,7 +13935,7 @@
                 <a:ea typeface="Noto Sans CJK JP"/>
                 <a:cs typeface="Noto Sans"/>
               </a:rPr>
-              <a:t>呵呵了 这物流速度也是没谁了 同城网购竟然三天了还不到</a:t>
+              <a:t>还不错，等试用一段时间再说</a:t>
             </a:r>
           </a:p>
         </p:txBody>
@@ -14313,7 +13949,7 @@
         <p:spPr>
           <a:xfrm>
             <a:off x="4617720" y="1783080"/>
-            <a:ext cx="3931920" cy="1286933"/>
+            <a:ext cx="3931920" cy="711200"/>
           </a:xfrm>
           <a:prstGeom prst="rect">
             <a:avLst/>
@@ -14373,7 +14009,7 @@
                 <a:ea typeface="Noto Sans CJK JP"/>
                 <a:cs typeface="Noto Sans"/>
               </a:rPr>
-              <a:t>いやあ、この配送の遅さにはあきれます。同じ市内なのに、ネットで注文してから3日たっても届きません。</a:t>
+              <a:t>悪くありません。しばらく使ってから、また評価します。</a:t>
             </a:r>
           </a:p>
         </p:txBody>
@@ -14386,7 +14022,7 @@
         </p:nvSpPr>
         <p:spPr>
           <a:xfrm>
-            <a:off x="585216" y="3331972"/>
+            <a:off x="585216" y="2757678"/>
             <a:ext cx="7955279" cy="393192"/>
           </a:xfrm>
           <a:prstGeom prst="rect">
@@ -14427,7 +14063,7 @@
                 <a:ea typeface="Noto Sans CJK JP"/>
                 <a:cs typeface="Noto Sans"/>
               </a:rPr>
-              <a:t>正解：否定的 / Negative</a:t>
+              <a:t>正解：肯定的 / Positive</a:t>
             </a:r>
           </a:p>
         </p:txBody>
@@ -14570,7 +14206,7 @@
                 <a:ea typeface="Noto Sans CJK JP"/>
                 <a:cs typeface="Noto Sans"/>
               </a:rPr>
-              <a:t>実例5：短い肯定と、今後の試用</a:t>
+              <a:t>実例6：使わなくても電池がなくなる</a:t>
             </a:r>
           </a:p>
         </p:txBody>
@@ -14740,7 +14376,7 @@
         <p:spPr>
           <a:xfrm>
             <a:off x="548640" y="1783080"/>
-            <a:ext cx="3840480" cy="431800"/>
+            <a:ext cx="3840480" cy="711200"/>
           </a:xfrm>
           <a:prstGeom prst="rect">
             <a:avLst/>
@@ -14800,7 +14436,7 @@
                 <a:ea typeface="Noto Sans CJK JP"/>
                 <a:cs typeface="Noto Sans"/>
               </a:rPr>
-              <a:t>还不错，等试用一段时间再说</a:t>
+              <a:t>冲满电2天没用过就没电   客服说正常的</a:t>
             </a:r>
           </a:p>
         </p:txBody>
@@ -14814,7 +14450,7 @@
         <p:spPr>
           <a:xfrm>
             <a:off x="4617720" y="1783080"/>
-            <a:ext cx="3931920" cy="711200"/>
+            <a:ext cx="3931920" cy="1286933"/>
           </a:xfrm>
           <a:prstGeom prst="rect">
             <a:avLst/>
@@ -14874,7 +14510,7 @@
                 <a:ea typeface="Noto Sans CJK JP"/>
                 <a:cs typeface="Noto Sans"/>
               </a:rPr>
-              <a:t>悪くありません。しばらく使ってから、また評価します。</a:t>
+              <a:t>満充電にしてから2日間使っていないのに、電池が切れました。カスタマーサービスは正常だと言っています。</a:t>
             </a:r>
           </a:p>
         </p:txBody>
@@ -14887,7 +14523,7 @@
         </p:nvSpPr>
         <p:spPr>
           <a:xfrm>
-            <a:off x="585216" y="2757678"/>
+            <a:off x="585216" y="3331972"/>
             <a:ext cx="7955279" cy="393192"/>
           </a:xfrm>
           <a:prstGeom prst="rect">
@@ -14928,7 +14564,7 @@
                 <a:ea typeface="Noto Sans CJK JP"/>
                 <a:cs typeface="Noto Sans"/>
               </a:rPr>
-              <a:t>正解：肯定的 / Positive</a:t>
+              <a:t>正解：否定的 / Negative</a:t>
             </a:r>
           </a:p>
         </p:txBody>
@@ -15214,7 +14850,7 @@
                 <a:ea typeface="Noto Sans CJK JP"/>
                 <a:cs typeface="Noto Sans"/>
               </a:rPr>
-              <a:t>CLEVAでの利用と入手方法</a:t>
+              <a:t>入手方法と利用条件</a:t>
             </a:r>
           </a:p>
         </p:txBody>
@@ -15328,7 +14964,7 @@
                 <a:ea typeface="Noto Sans CJK JP"/>
                 <a:cs typeface="Noto Sans"/>
               </a:rPr>
-              <a:t>実例6：使わなくても電池がなくなる</a:t>
+              <a:t>実例7：高齢者にも使いやすい携帯電話</a:t>
             </a:r>
           </a:p>
         </p:txBody>
@@ -15558,7 +15194,7 @@
                 <a:ea typeface="Noto Sans CJK JP"/>
                 <a:cs typeface="Noto Sans"/>
               </a:rPr>
-              <a:t>冲满电2天没用过就没电   客服说正常的</a:t>
+              <a:t>手机好用，声音大，手写流利，老人非常中意。</a:t>
             </a:r>
           </a:p>
         </p:txBody>
@@ -15632,7 +15268,7 @@
                 <a:ea typeface="Noto Sans CJK JP"/>
                 <a:cs typeface="Noto Sans"/>
               </a:rPr>
-              <a:t>満充電にしてから2日間使っていないのに、電池が切れました。カスタマーサービスは正常だと言っています。</a:t>
+              <a:t>携帯電話は使いやすく、音が大きく、手書き入力もスムーズです。高齢の人がとても気に入っています。</a:t>
             </a:r>
           </a:p>
         </p:txBody>
@@ -15686,7 +15322,7 @@
                 <a:ea typeface="Noto Sans CJK JP"/>
                 <a:cs typeface="Noto Sans"/>
               </a:rPr>
-              <a:t>正解：否定的 / Negative</a:t>
+              <a:t>正解：肯定的 / Positive</a:t>
             </a:r>
           </a:p>
         </p:txBody>
@@ -15829,7 +15465,7 @@
                 <a:ea typeface="Noto Sans CJK JP"/>
                 <a:cs typeface="Noto Sans"/>
               </a:rPr>
-              <a:t>実例7：高齢者にも使いやすい携帯電話</a:t>
+              <a:t>実例8：音や装着感への不満と肯定的ラベル</a:t>
             </a:r>
           </a:p>
         </p:txBody>
@@ -15999,7 +15635,7 @@
         <p:spPr>
           <a:xfrm>
             <a:off x="548640" y="1783080"/>
-            <a:ext cx="3840480" cy="711200"/>
+            <a:ext cx="3840480" cy="1286933"/>
           </a:xfrm>
           <a:prstGeom prst="rect">
             <a:avLst/>
@@ -16059,7 +15695,7 @@
                 <a:ea typeface="Noto Sans CJK JP"/>
                 <a:cs typeface="Noto Sans"/>
               </a:rPr>
-              <a:t>手机好用，声音大，手写流利，老人非常中意。</a:t>
+              <a:t>耳机做工还行，音效的话没有想象中的那么好，可能需要煲机吧，耳机戴了一两个小时耳朵就有点疼</a:t>
             </a:r>
           </a:p>
         </p:txBody>
@@ -16073,7 +15709,7 @@
         <p:spPr>
           <a:xfrm>
             <a:off x="4617720" y="1783080"/>
-            <a:ext cx="3931920" cy="1286933"/>
+            <a:ext cx="3931920" cy="1566333"/>
           </a:xfrm>
           <a:prstGeom prst="rect">
             <a:avLst/>
@@ -16101,7 +15737,7 @@
           </a:fontRef>
         </p:style>
         <p:txBody>
-          <a:bodyPr rtlCol="0" anchor="t" wrap="square" lIns="177800" rIns="177800" tIns="68580" bIns="127000">
+          <a:bodyPr rtlCol="0" anchor="t" wrap="square" lIns="177800" rIns="177800" tIns="60113" bIns="127000">
             <a:noAutofit/>
           </a:bodyPr>
           <a:lstStyle/>
@@ -16133,7 +15769,7 @@
                 <a:ea typeface="Noto Sans CJK JP"/>
                 <a:cs typeface="Noto Sans"/>
               </a:rPr>
-              <a:t>携帯電話は使いやすく、音が大きく、手書き入力もスムーズです。高齢の人がとても気に入っています。</a:t>
+              <a:t>イヤホンの作りはまあまあです。音は想像していたほどよくなく、慣らし運転が必要なのかもしれません。1、2時間着けると、耳が少し痛くなります。</a:t>
             </a:r>
           </a:p>
         </p:txBody>
@@ -16146,7 +15782,7 @@
         </p:nvSpPr>
         <p:spPr>
           <a:xfrm>
-            <a:off x="585216" y="3331972"/>
+            <a:off x="585216" y="3619119"/>
             <a:ext cx="7955279" cy="393192"/>
           </a:xfrm>
           <a:prstGeom prst="rect">
@@ -16330,7 +15966,7 @@
                 <a:ea typeface="Noto Sans CJK JP"/>
                 <a:cs typeface="Noto Sans"/>
               </a:rPr>
-              <a:t>実例8：音や装着感への不満と肯定的ラベル</a:t>
+              <a:t>実例9：中国製品を応援しつつ、操作に戸惑う</a:t>
             </a:r>
           </a:p>
         </p:txBody>
@@ -16500,7 +16136,7 @@
         <p:spPr>
           <a:xfrm>
             <a:off x="548640" y="1783080"/>
-            <a:ext cx="3840480" cy="1286933"/>
+            <a:ext cx="3840480" cy="711200"/>
           </a:xfrm>
           <a:prstGeom prst="rect">
             <a:avLst/>
@@ -16560,7 +16196,7 @@
                 <a:ea typeface="Noto Sans CJK JP"/>
                 <a:cs typeface="Noto Sans"/>
               </a:rPr>
-              <a:t>耳机做工还行，音效的话没有想象中的那么好，可能需要煲机吧，耳机戴了一两个小时耳朵就有点疼</a:t>
+              <a:t>支持国产，用起来挺好的，操作有点不习惯。</a:t>
             </a:r>
           </a:p>
         </p:txBody>
@@ -16574,7 +16210,7 @@
         <p:spPr>
           <a:xfrm>
             <a:off x="4617720" y="1783080"/>
-            <a:ext cx="3931920" cy="1566333"/>
+            <a:ext cx="3931920" cy="999066"/>
           </a:xfrm>
           <a:prstGeom prst="rect">
             <a:avLst/>
@@ -16602,7 +16238,7 @@
           </a:fontRef>
         </p:style>
         <p:txBody>
-          <a:bodyPr rtlCol="0" anchor="t" wrap="square" lIns="177800" rIns="177800" tIns="60113" bIns="127000">
+          <a:bodyPr rtlCol="0" anchor="t" wrap="square" lIns="177800" rIns="177800" tIns="68580" bIns="127000">
             <a:noAutofit/>
           </a:bodyPr>
           <a:lstStyle/>
@@ -16634,7 +16270,7 @@
                 <a:ea typeface="Noto Sans CJK JP"/>
                 <a:cs typeface="Noto Sans"/>
               </a:rPr>
-              <a:t>イヤホンの作りはまあまあです。音は想像していたほどよくなく、慣らし運転が必要なのかもしれません。1、2時間着けると、耳が少し痛くなります。</a:t>
+              <a:t>中国製品を応援します。使い心地はよいですが、操作には少し不慣れです。</a:t>
             </a:r>
           </a:p>
         </p:txBody>
@@ -16647,7 +16283,7 @@
         </p:nvSpPr>
         <p:spPr>
           <a:xfrm>
-            <a:off x="585216" y="3619119"/>
+            <a:off x="585216" y="3044825"/>
             <a:ext cx="7955279" cy="393192"/>
           </a:xfrm>
           <a:prstGeom prst="rect">
@@ -16831,7 +16467,7 @@
                 <a:ea typeface="Noto Sans CJK JP"/>
                 <a:cs typeface="Noto Sans"/>
               </a:rPr>
-              <a:t>実例9：中国製品を応援しつつ、操作に戸惑う</a:t>
+              <a:t>実例10：厚さが期待と合わない</a:t>
             </a:r>
           </a:p>
         </p:txBody>
@@ -17001,7 +16637,7 @@
         <p:spPr>
           <a:xfrm>
             <a:off x="548640" y="1783080"/>
-            <a:ext cx="3840480" cy="711200"/>
+            <a:ext cx="3840480" cy="999066"/>
           </a:xfrm>
           <a:prstGeom prst="rect">
             <a:avLst/>
@@ -17061,7 +16697,7 @@
                 <a:ea typeface="Noto Sans CJK JP"/>
                 <a:cs typeface="Noto Sans"/>
               </a:rPr>
-              <a:t>支持国产，用起来挺好的，操作有点不习惯。</a:t>
+              <a:t>太厚了，和期待值有差距.夏天揣口袋里绝对不和谐.看来只能应急用用了.</a:t>
             </a:r>
           </a:p>
         </p:txBody>
@@ -17075,7 +16711,7 @@
         <p:spPr>
           <a:xfrm>
             <a:off x="4617720" y="1783080"/>
-            <a:ext cx="3931920" cy="999066"/>
+            <a:ext cx="3931920" cy="1574800"/>
           </a:xfrm>
           <a:prstGeom prst="rect">
             <a:avLst/>
@@ -17135,7 +16771,7 @@
                 <a:ea typeface="Noto Sans CJK JP"/>
                 <a:cs typeface="Noto Sans"/>
               </a:rPr>
-              <a:t>中国製品を応援します。使い心地はよいですが、操作には少し不慣れです。</a:t>
+              <a:t>厚すぎて、期待していたものとは違いました。夏にポケットへ入れたら、どう見ても不格好です。どうやら非常用に使うしかなさそうです。</a:t>
             </a:r>
           </a:p>
         </p:txBody>
@@ -17148,7 +16784,7 @@
         </p:nvSpPr>
         <p:spPr>
           <a:xfrm>
-            <a:off x="585216" y="3044825"/>
+            <a:off x="585216" y="3619119"/>
             <a:ext cx="7955279" cy="393192"/>
           </a:xfrm>
           <a:prstGeom prst="rect">
@@ -17189,7 +16825,7 @@
                 <a:ea typeface="Noto Sans CJK JP"/>
                 <a:cs typeface="Noto Sans"/>
               </a:rPr>
-              <a:t>正解：肯定的 / Positive</a:t>
+              <a:t>正解：否定的 / Negative</a:t>
             </a:r>
           </a:p>
         </p:txBody>
@@ -17332,7 +16968,7 @@
                 <a:ea typeface="Noto Sans CJK JP"/>
                 <a:cs typeface="Noto Sans"/>
               </a:rPr>
-              <a:t>実例10：厚さが期待と合わない</a:t>
+              <a:t>実例11：使って分かった複数の問題</a:t>
             </a:r>
           </a:p>
         </p:txBody>
@@ -17502,7 +17138,7 @@
         <p:spPr>
           <a:xfrm>
             <a:off x="548640" y="1783080"/>
-            <a:ext cx="3840480" cy="999066"/>
+            <a:ext cx="3840480" cy="1007533"/>
           </a:xfrm>
           <a:prstGeom prst="rect">
             <a:avLst/>
@@ -17562,7 +17198,7 @@
                 <a:ea typeface="Noto Sans CJK JP"/>
                 <a:cs typeface="Noto Sans"/>
               </a:rPr>
-              <a:t>太厚了，和期待值有差距.夏天揣口袋里绝对不和谐.看来只能应急用用了.</a:t>
+              <a:t>用了几天，发现很多问题，无线网容易掉线，屏幕容易刮花，打开网页容易死掉，不值的买</a:t>
             </a:r>
           </a:p>
         </p:txBody>
@@ -17576,7 +17212,7 @@
         <p:spPr>
           <a:xfrm>
             <a:off x="4617720" y="1783080"/>
-            <a:ext cx="3931920" cy="1574800"/>
+            <a:ext cx="3931920" cy="1862666"/>
           </a:xfrm>
           <a:prstGeom prst="rect">
             <a:avLst/>
@@ -17636,7 +17272,7 @@
                 <a:ea typeface="Noto Sans CJK JP"/>
                 <a:cs typeface="Noto Sans"/>
               </a:rPr>
-              <a:t>厚すぎて、期待していたものとは違いました。夏にポケットへ入れたら、どう見ても不格好です。どうやら非常用に使うしかなさそうです。</a:t>
+              <a:t>数日使って、多くの問題に気づきました。無線ネットワークは切れやすく、画面は傷つきやすく、ウェブページを開くとフリーズしやすいです。買う価値はありません。</a:t>
             </a:r>
           </a:p>
         </p:txBody>
@@ -17649,7 +17285,7 @@
         </p:nvSpPr>
         <p:spPr>
           <a:xfrm>
-            <a:off x="585216" y="3619119"/>
+            <a:off x="585216" y="3906266"/>
             <a:ext cx="7955279" cy="393192"/>
           </a:xfrm>
           <a:prstGeom prst="rect">
@@ -17833,7 +17469,7 @@
                 <a:ea typeface="Noto Sans CJK JP"/>
                 <a:cs typeface="Noto Sans"/>
               </a:rPr>
-              <a:t>実例11：使って分かった複数の問題</a:t>
+              <a:t>実例12：イヤホンが見当たらず、気分が変わる</a:t>
             </a:r>
           </a:p>
         </p:txBody>
@@ -18003,7 +17639,7 @@
         <p:spPr>
           <a:xfrm>
             <a:off x="548640" y="1783080"/>
-            <a:ext cx="3840480" cy="1007533"/>
+            <a:ext cx="3840480" cy="1286933"/>
           </a:xfrm>
           <a:prstGeom prst="rect">
             <a:avLst/>
@@ -18063,7 +17699,7 @@
                 <a:ea typeface="Noto Sans CJK JP"/>
                 <a:cs typeface="Noto Sans"/>
               </a:rPr>
-              <a:t>用了几天，发现很多问题，无线网容易掉线，屏幕容易刮花，打开网页容易死掉，不值的买</a:t>
+              <a:t>收到手机的时候挺高兴的。 但是我找了半天都没有找到耳机，跟我想象的不太一样 心情立马不好了</a:t>
             </a:r>
           </a:p>
         </p:txBody>
@@ -18137,7 +17773,7 @@
                 <a:ea typeface="Noto Sans CJK JP"/>
                 <a:cs typeface="Noto Sans"/>
               </a:rPr>
-              <a:t>数日使って、多くの問題に気づきました。無線ネットワークは切れやすく、画面は傷つきやすく、ウェブページを開くとフリーズしやすいです。買う価値はありません。</a:t>
+              <a:t>携帯電話が届いたときはうれしかったです。でも、ずいぶん探してもイヤホンが見つからず、想像していたものとは少し違いました。たちまち嫌な気分になりました。</a:t>
             </a:r>
           </a:p>
         </p:txBody>
@@ -18334,7 +17970,7 @@
                 <a:ea typeface="Noto Sans CJK JP"/>
                 <a:cs typeface="Noto Sans"/>
               </a:rPr>
-              <a:t>実例12：イヤホンが見当たらず、気分が変わる</a:t>
+              <a:t>実例13：イヤホンへの不満と肯定的ラベル</a:t>
             </a:r>
           </a:p>
         </p:txBody>
@@ -18504,7 +18140,7 @@
         <p:spPr>
           <a:xfrm>
             <a:off x="548640" y="1783080"/>
-            <a:ext cx="3840480" cy="1286933"/>
+            <a:ext cx="3840480" cy="999066"/>
           </a:xfrm>
           <a:prstGeom prst="rect">
             <a:avLst/>
@@ -18564,7 +18200,7 @@
                 <a:ea typeface="Noto Sans CJK JP"/>
                 <a:cs typeface="Noto Sans"/>
               </a:rPr>
-              <a:t>收到手机的时候挺高兴的。 但是我找了半天都没有找到耳机，跟我想象的不太一样 心情立马不好了</a:t>
+              <a:t>一分钱一分货嘛，毕竟价格在这里，也不错了，没送耳机，本人不高兴</a:t>
             </a:r>
           </a:p>
         </p:txBody>
@@ -18578,7 +18214,7 @@
         <p:spPr>
           <a:xfrm>
             <a:off x="4617720" y="1783080"/>
-            <a:ext cx="3931920" cy="1862666"/>
+            <a:ext cx="3931920" cy="1286933"/>
           </a:xfrm>
           <a:prstGeom prst="rect">
             <a:avLst/>
@@ -18638,7 +18274,7 @@
                 <a:ea typeface="Noto Sans CJK JP"/>
                 <a:cs typeface="Noto Sans"/>
               </a:rPr>
-              <a:t>携帯電話が届いたときはうれしかったです。でも、ずいぶん探してもイヤホンが見つからず、想像していたものとは少し違いました。たちまち嫌な気分になりました。</a:t>
+              <a:t>値段なりですよね。結局この価格ですし、悪くありません。イヤホンが付いてこなかったので、私は不満です。</a:t>
             </a:r>
           </a:p>
         </p:txBody>
@@ -18651,7 +18287,7 @@
         </p:nvSpPr>
         <p:spPr>
           <a:xfrm>
-            <a:off x="585216" y="3906266"/>
+            <a:off x="585216" y="3331972"/>
             <a:ext cx="7955279" cy="393192"/>
           </a:xfrm>
           <a:prstGeom prst="rect">
@@ -18692,7 +18328,7 @@
                 <a:ea typeface="Noto Sans CJK JP"/>
                 <a:cs typeface="Noto Sans"/>
               </a:rPr>
-              <a:t>正解：否定的 / Negative</a:t>
+              <a:t>正解：肯定的 / Positive</a:t>
             </a:r>
           </a:p>
         </p:txBody>
@@ -18804,38 +18440,38 @@
         </p:nvSpPr>
         <p:spPr>
           <a:xfrm>
-            <a:off x="468172" y="650138"/>
-            <a:ext cx="8206740" cy="616305"/>
-          </a:xfrm>
-        </p:spPr>
-        <p:txBody>
-          <a:bodyPr wrap="square" lIns="0" rIns="0" tIns="0" bIns="0">
+            <a:off x="548640" y="2506875"/>
+            <a:ext cx="8046720" cy="585216"/>
+          </a:xfrm>
+        </p:spPr>
+        <p:txBody>
+          <a:bodyPr wrap="square" lIns="0" rIns="0" tIns="0" bIns="0" anchor="ctr">
             <a:noAutofit/>
           </a:bodyPr>
           <a:lstStyle/>
           <a:p>
-            <a:pPr algn="l">
+            <a:pPr algn="ctr">
               <a:lnSpc>
                 <a:spcPct val="110000"/>
               </a:lnSpc>
               <a:buNone/>
-              <a:defRPr sz="2800" b="0">
-                <a:solidFill>
-                  <a:srgbClr val="303437"/>
-                </a:solidFill>
-                <a:latin typeface="Noto Sans"/>
-              </a:defRPr>
-            </a:pPr>
-            <a:r>
-              <a:rPr sz="2800" b="1" lang="ja-JP" altLang="en-US">
-                <a:solidFill>
-                  <a:srgbClr val="303437"/>
-                </a:solidFill>
-                <a:latin typeface="Noto Sans"/>
-                <a:ea typeface="Noto Sans CJK JP"/>
-                <a:cs typeface="Noto Sans"/>
-              </a:rPr>
-              <a:t>実例13：イヤホンへの不満と肯定的ラベル</a:t>
+              <a:defRPr sz="3600" b="0">
+                <a:solidFill>
+                  <a:srgbClr val="303437"/>
+                </a:solidFill>
+                <a:latin typeface="Noto Sans"/>
+              </a:defRPr>
+            </a:pPr>
+            <a:r>
+              <a:rPr sz="3600" b="1" lang="ja-JP" altLang="en-US">
+                <a:solidFill>
+                  <a:srgbClr val="303437"/>
+                </a:solidFill>
+                <a:latin typeface="Noto Sans"/>
+                <a:ea typeface="Noto Sans CJK JP"/>
+                <a:cs typeface="Noto Sans"/>
+              </a:rPr>
+              <a:t>学習方式の比較と参考文献</a:t>
             </a:r>
           </a:p>
         </p:txBody>
@@ -18883,394 +18519,7 @@
                 <a:ea typeface="Noto Sans CJK JP"/>
                 <a:cs typeface="Noto Sans"/>
               </a:rPr>
-              <a:t>Appendix: 1. 追加の商品レビュー</a:t>
-            </a:r>
-          </a:p>
-        </p:txBody>
-      </p:sp>
-      <p:sp>
-        <p:nvSpPr>
-          <p:cNvPr id="4" name="TextBox 3"/>
-          <p:cNvSpPr txBox="1"/>
-          <p:nvPr/>
-        </p:nvSpPr>
-        <p:spPr>
-          <a:xfrm>
-            <a:off x="548640" y="1554480"/>
-            <a:ext cx="3840480" cy="228600"/>
-          </a:xfrm>
-          <a:prstGeom prst="rect">
-            <a:avLst/>
-          </a:prstGeom>
-          <a:noFill/>
-        </p:spPr>
-        <p:txBody>
-          <a:bodyPr wrap="square" lIns="0" rIns="0" tIns="0" bIns="0">
-            <a:noAutofit/>
-          </a:bodyPr>
-          <a:lstStyle/>
-          <a:p>
-            <a:pPr algn="l">
-              <a:lnSpc>
-                <a:spcPts val="1404"/>
-              </a:lnSpc>
-              <a:spcBef>
-                <a:spcPts val="0"/>
-              </a:spcBef>
-              <a:spcAft>
-                <a:spcPts val="0"/>
-              </a:spcAft>
-              <a:buNone/>
-              <a:defRPr sz="1200" b="0">
-                <a:solidFill>
-                  <a:srgbClr val="303437"/>
-                </a:solidFill>
-                <a:latin typeface="Noto Sans"/>
-              </a:defRPr>
-            </a:pPr>
-            <a:r>
-              <a:rPr sz="1200" b="0" lang="ja-JP" altLang="en-US">
-                <a:solidFill>
-                  <a:srgbClr val="626669"/>
-                </a:solidFill>
-                <a:latin typeface="Noto Sans"/>
-                <a:ea typeface="Noto Sans CJK JP"/>
-                <a:cs typeface="Noto Sans"/>
-              </a:rPr>
-              <a:t>中国語原文（全文）</a:t>
-            </a:r>
-          </a:p>
-        </p:txBody>
-      </p:sp>
-      <p:sp>
-        <p:nvSpPr>
-          <p:cNvPr id="5" name="TextBox 4"/>
-          <p:cNvSpPr txBox="1"/>
-          <p:nvPr/>
-        </p:nvSpPr>
-        <p:spPr>
-          <a:xfrm>
-            <a:off x="4617720" y="1554480"/>
-            <a:ext cx="3931920" cy="228600"/>
-          </a:xfrm>
-          <a:prstGeom prst="rect">
-            <a:avLst/>
-          </a:prstGeom>
-          <a:noFill/>
-        </p:spPr>
-        <p:txBody>
-          <a:bodyPr wrap="square" lIns="0" rIns="0" tIns="0" bIns="0">
-            <a:noAutofit/>
-          </a:bodyPr>
-          <a:lstStyle/>
-          <a:p>
-            <a:pPr algn="l">
-              <a:lnSpc>
-                <a:spcPts val="1404"/>
-              </a:lnSpc>
-              <a:spcBef>
-                <a:spcPts val="0"/>
-              </a:spcBef>
-              <a:spcAft>
-                <a:spcPts val="0"/>
-              </a:spcAft>
-              <a:buNone/>
-              <a:defRPr sz="1200" b="0">
-                <a:solidFill>
-                  <a:srgbClr val="303437"/>
-                </a:solidFill>
-                <a:latin typeface="Noto Sans"/>
-              </a:defRPr>
-            </a:pPr>
-            <a:r>
-              <a:rPr sz="1200" b="0" lang="ja-JP" altLang="en-US">
-                <a:solidFill>
-                  <a:srgbClr val="626669"/>
-                </a:solidFill>
-                <a:latin typeface="Noto Sans"/>
-                <a:ea typeface="Noto Sans CJK JP"/>
-                <a:cs typeface="Noto Sans"/>
-              </a:rPr>
-              <a:t>日本語訳</a:t>
-            </a:r>
-          </a:p>
-        </p:txBody>
-      </p:sp>
-      <p:sp>
-        <p:nvSpPr>
-          <p:cNvPr id="6" name="quote-frame"/>
-          <p:cNvSpPr/>
-          <p:nvPr/>
-        </p:nvSpPr>
-        <p:spPr>
-          <a:xfrm>
-            <a:off x="548640" y="1783080"/>
-            <a:ext cx="3840480" cy="999066"/>
-          </a:xfrm>
-          <a:prstGeom prst="rect">
-            <a:avLst/>
-          </a:prstGeom>
-          <a:solidFill>
-            <a:srgbClr val="EBEDEB"/>
-          </a:solidFill>
-          <a:ln>
-            <a:noFill/>
-          </a:ln>
-          <a:effectLst/>
-        </p:spPr>
-        <p:style>
-          <a:lnRef idx="1">
-            <a:schemeClr val="accent1"/>
-          </a:lnRef>
-          <a:fillRef idx="3">
-            <a:schemeClr val="accent1"/>
-          </a:fillRef>
-          <a:effectRef idx="0">
-            <a:schemeClr val="accent1"/>
-          </a:effectRef>
-          <a:fontRef idx="minor">
-            <a:schemeClr val="lt1"/>
-          </a:fontRef>
-        </p:style>
-        <p:txBody>
-          <a:bodyPr rtlCol="0" anchor="t" wrap="square" lIns="177800" rIns="177800" tIns="68580" bIns="127000">
-            <a:noAutofit/>
-          </a:bodyPr>
-          <a:lstStyle/>
-          <a:p>
-            <a:pPr algn="l">
-              <a:lnSpc>
-                <a:spcPts val="2261"/>
-              </a:lnSpc>
-              <a:spcBef>
-                <a:spcPts val="0"/>
-              </a:spcBef>
-              <a:spcAft>
-                <a:spcPts val="0"/>
-              </a:spcAft>
-              <a:buNone/>
-              <a:defRPr sz="1900" b="0">
-                <a:solidFill>
-                  <a:srgbClr val="303437"/>
-                </a:solidFill>
-                <a:latin typeface="Noto Sans"/>
-              </a:defRPr>
-            </a:pPr>
-            <a:r>
-              <a:rPr sz="1900" b="0" lang="ja-JP" altLang="en-US">
-                <a:solidFill>
-                  <a:srgbClr val="303437"/>
-                </a:solidFill>
-                <a:latin typeface="Noto Sans"/>
-                <a:ea typeface="Noto Sans CJK JP"/>
-                <a:cs typeface="Noto Sans"/>
-              </a:rPr>
-              <a:t>一分钱一分货嘛，毕竟价格在这里，也不错了，没送耳机，本人不高兴</a:t>
-            </a:r>
-          </a:p>
-        </p:txBody>
-      </p:sp>
-      <p:sp>
-        <p:nvSpPr>
-          <p:cNvPr id="7" name="quote-frame"/>
-          <p:cNvSpPr/>
-          <p:nvPr/>
-        </p:nvSpPr>
-        <p:spPr>
-          <a:xfrm>
-            <a:off x="4617720" y="1783080"/>
-            <a:ext cx="3931920" cy="1286933"/>
-          </a:xfrm>
-          <a:prstGeom prst="rect">
-            <a:avLst/>
-          </a:prstGeom>
-          <a:solidFill>
-            <a:srgbClr val="EBEDEB"/>
-          </a:solidFill>
-          <a:ln>
-            <a:noFill/>
-          </a:ln>
-          <a:effectLst/>
-        </p:spPr>
-        <p:style>
-          <a:lnRef idx="1">
-            <a:schemeClr val="accent1"/>
-          </a:lnRef>
-          <a:fillRef idx="3">
-            <a:schemeClr val="accent1"/>
-          </a:fillRef>
-          <a:effectRef idx="0">
-            <a:schemeClr val="accent1"/>
-          </a:effectRef>
-          <a:fontRef idx="minor">
-            <a:schemeClr val="lt1"/>
-          </a:fontRef>
-        </p:style>
-        <p:txBody>
-          <a:bodyPr rtlCol="0" anchor="t" wrap="square" lIns="177800" rIns="177800" tIns="68580" bIns="127000">
-            <a:noAutofit/>
-          </a:bodyPr>
-          <a:lstStyle/>
-          <a:p>
-            <a:pPr algn="l">
-              <a:lnSpc>
-                <a:spcPts val="2261"/>
-              </a:lnSpc>
-              <a:spcBef>
-                <a:spcPts val="0"/>
-              </a:spcBef>
-              <a:spcAft>
-                <a:spcPts val="0"/>
-              </a:spcAft>
-              <a:buNone/>
-              <a:defRPr sz="1900" b="0">
-                <a:solidFill>
-                  <a:srgbClr val="303437"/>
-                </a:solidFill>
-                <a:latin typeface="Noto Sans"/>
-              </a:defRPr>
-            </a:pPr>
-            <a:r>
-              <a:rPr sz="1900" b="0" lang="ja-JP" altLang="en-US">
-                <a:solidFill>
-                  <a:srgbClr val="303437"/>
-                </a:solidFill>
-                <a:latin typeface="Noto Sans"/>
-                <a:ea typeface="Noto Sans CJK JP"/>
-                <a:cs typeface="Noto Sans"/>
-              </a:rPr>
-              <a:t>値段なりですよね。結局この価格ですし、悪くありません。イヤホンが付いてこなかったので、私は不満です。</a:t>
-            </a:r>
-          </a:p>
-        </p:txBody>
-      </p:sp>
-      <p:sp>
-        <p:nvSpPr>
-          <p:cNvPr id="8" name="answer"/>
-          <p:cNvSpPr txBox="1"/>
-          <p:nvPr/>
-        </p:nvSpPr>
-        <p:spPr>
-          <a:xfrm>
-            <a:off x="585216" y="3331972"/>
-            <a:ext cx="7955279" cy="393192"/>
-          </a:xfrm>
-          <a:prstGeom prst="rect">
-            <a:avLst/>
-          </a:prstGeom>
-          <a:noFill/>
-        </p:spPr>
-        <p:txBody>
-          <a:bodyPr wrap="square" lIns="0" rIns="0" tIns="0" bIns="0">
-            <a:noAutofit/>
-          </a:bodyPr>
-          <a:lstStyle/>
-          <a:p>
-            <a:pPr algn="l">
-              <a:lnSpc>
-                <a:spcPts val="2457"/>
-              </a:lnSpc>
-              <a:spcBef>
-                <a:spcPts val="0"/>
-              </a:spcBef>
-              <a:spcAft>
-                <a:spcPts val="0"/>
-              </a:spcAft>
-              <a:buNone/>
-              <a:defRPr sz="2100" b="0">
-                <a:solidFill>
-                  <a:srgbClr val="303437"/>
-                </a:solidFill>
-                <a:latin typeface="Noto Sans"/>
-              </a:defRPr>
-            </a:pPr>
-            <a:r>
-              <a:rPr sz="2100" b="1" lang="ja-JP" altLang="en-US">
-                <a:solidFill>
-                  <a:srgbClr val="B13731"/>
-                </a:solidFill>
-                <a:latin typeface="Noto Sans"/>
-                <a:ea typeface="Noto Sans CJK JP"/>
-                <a:cs typeface="Noto Sans"/>
-              </a:rPr>
-              <a:t>正解：肯定的 / Positive</a:t>
-            </a:r>
-          </a:p>
-        </p:txBody>
-      </p:sp>
-      <p:sp>
-        <p:nvSpPr>
-          <p:cNvPr id="9" name="sources"/>
-          <p:cNvSpPr txBox="1"/>
-          <p:nvPr/>
-        </p:nvSpPr>
-        <p:spPr>
-          <a:xfrm>
-            <a:off x="502920" y="4700016"/>
-            <a:ext cx="8183879" cy="530352"/>
-          </a:xfrm>
-          <a:prstGeom prst="rect">
-            <a:avLst/>
-          </a:prstGeom>
-          <a:noFill/>
-        </p:spPr>
-        <p:txBody>
-          <a:bodyPr wrap="square" lIns="0" rIns="0" tIns="0" bIns="0">
-            <a:noAutofit/>
-          </a:bodyPr>
-          <a:lstStyle/>
-          <a:p>
-            <a:pPr algn="l">
-              <a:lnSpc>
-                <a:spcPts val="940"/>
-              </a:lnSpc>
-              <a:spcBef>
-                <a:spcPts val="0"/>
-              </a:spcBef>
-              <a:spcAft>
-                <a:spcPts val="140"/>
-              </a:spcAft>
-              <a:buNone/>
-              <a:defRPr sz="810" b="0">
-                <a:solidFill>
-                  <a:srgbClr val="303437"/>
-                </a:solidFill>
-                <a:latin typeface="Noto Sans"/>
-              </a:defRPr>
-            </a:pPr>
-            <a:r>
-              <a:rPr sz="810" b="0" lang="ja-JP" altLang="en-US">
-                <a:solidFill>
-                  <a:srgbClr val="626669"/>
-                </a:solidFill>
-                <a:latin typeface="Noto Sans"/>
-                <a:ea typeface="Noto Sans CJK JP"/>
-                <a:cs typeface="Noto Sans"/>
-              </a:rPr>
-              <a:t>[1] CLUE team (n.d.). FewCLUE — EPRSTMT. test_public.json.</a:t>
-            </a:r>
-            <a:r>
-              <a:rPr sz="810" b="0" lang="ja-JP" altLang="en-US">
-                <a:solidFill>
-                  <a:srgbClr val="626669"/>
-                </a:solidFill>
-                <a:latin typeface="Noto Sans"/>
-                <a:ea typeface="Noto Sans CJK JP"/>
-                <a:cs typeface="Noto Sans"/>
-              </a:rPr>
-              <a:t>  </a:t>
-            </a:r>
-            <a:r>
-              <a:rPr sz="810" b="0" lang="ja-JP" altLang="en-US">
-                <a:solidFill>
-                  <a:srgbClr val="626669"/>
-                </a:solidFill>
-                <a:latin typeface="Noto Sans"/>
-                <a:ea typeface="Noto Sans CJK JP"/>
-                <a:cs typeface="Noto Sans"/>
-                <a:hlinkClick r:id="rId2"/>
-              </a:rPr>
-              <a:t>https://github.com/CLUEbenchmark/FewCLUE/blob/main/datasets/eprstmt/test_public.json</a:t>
+              <a:t>Appendix: 2. 学習方式の比較と参考文献</a:t>
             </a:r>
           </a:p>
         </p:txBody>
@@ -19284,120 +18533,6 @@
 </file>
 
 <file path=ppt/slides/slide38.xml><?xml version="1.0" encoding="utf-8"?>
-<p:sld xmlns:a="http://schemas.openxmlformats.org/drawingml/2006/main" xmlns:p="http://schemas.openxmlformats.org/presentationml/2006/main" xmlns:r="http://schemas.openxmlformats.org/officeDocument/2006/relationships">
-  <p:cSld>
-    <p:spTree>
-      <p:nvGrpSpPr>
-        <p:cNvPr id="1" name=""/>
-        <p:cNvGrpSpPr/>
-        <p:nvPr/>
-      </p:nvGrpSpPr>
-      <p:grpSpPr/>
-      <p:sp>
-        <p:nvSpPr>
-          <p:cNvPr id="2" name="Title 1"/>
-          <p:cNvSpPr>
-            <a:spLocks noGrp="1"/>
-          </p:cNvSpPr>
-          <p:nvPr>
-            <p:ph type="title"/>
-          </p:nvPr>
-        </p:nvSpPr>
-        <p:spPr>
-          <a:xfrm>
-            <a:off x="548640" y="2506875"/>
-            <a:ext cx="8046720" cy="585216"/>
-          </a:xfrm>
-        </p:spPr>
-        <p:txBody>
-          <a:bodyPr wrap="square" lIns="0" rIns="0" tIns="0" bIns="0" anchor="ctr">
-            <a:noAutofit/>
-          </a:bodyPr>
-          <a:lstStyle/>
-          <a:p>
-            <a:pPr algn="ctr">
-              <a:lnSpc>
-                <a:spcPct val="110000"/>
-              </a:lnSpc>
-              <a:buNone/>
-              <a:defRPr sz="3600" b="0">
-                <a:solidFill>
-                  <a:srgbClr val="303437"/>
-                </a:solidFill>
-                <a:latin typeface="Noto Sans"/>
-              </a:defRPr>
-            </a:pPr>
-            <a:r>
-              <a:rPr sz="3600" b="1" lang="ja-JP" altLang="en-US">
-                <a:solidFill>
-                  <a:srgbClr val="303437"/>
-                </a:solidFill>
-                <a:latin typeface="Noto Sans"/>
-                <a:ea typeface="Noto Sans CJK JP"/>
-                <a:cs typeface="Noto Sans"/>
-              </a:rPr>
-              <a:t>学習方式の比較と参考文献</a:t>
-            </a:r>
-          </a:p>
-        </p:txBody>
-      </p:sp>
-      <p:sp>
-        <p:nvSpPr>
-          <p:cNvPr id="3" name="Title 2"/>
-          <p:cNvSpPr>
-            <a:spLocks noGrp="1"/>
-          </p:cNvSpPr>
-          <p:nvPr>
-            <p:ph type="title" idx="2"/>
-          </p:nvPr>
-        </p:nvSpPr>
-        <p:spPr>
-          <a:xfrm>
-            <a:off x="75895" y="0"/>
-            <a:ext cx="8115300" cy="480060"/>
-          </a:xfrm>
-        </p:spPr>
-        <p:txBody>
-          <a:bodyPr wrap="square" lIns="0" rIns="0" tIns="0" bIns="0" anchor="ctr">
-            <a:noAutofit/>
-          </a:bodyPr>
-          <a:lstStyle/>
-          <a:p>
-            <a:pPr algn="l">
-              <a:lnSpc>
-                <a:spcPct val="110000"/>
-              </a:lnSpc>
-              <a:buNone/>
-              <a:defRPr sz="1400" b="0">
-                <a:solidFill>
-                  <a:srgbClr val="303437"/>
-                </a:solidFill>
-                <a:latin typeface="Noto Sans"/>
-              </a:defRPr>
-            </a:pPr>
-            <a:r>
-              <a:rPr sz="1400" b="1" lang="ja-JP" altLang="en-US">
-                <a:solidFill>
-                  <a:srgbClr val="FFFEF8"/>
-                </a:solidFill>
-                <a:latin typeface="Noto Sans"/>
-                <a:ea typeface="Noto Sans CJK JP"/>
-                <a:cs typeface="Noto Sans"/>
-              </a:rPr>
-              <a:t>Appendix: 2. 学習方式の比較と参考文献</a:t>
-            </a:r>
-          </a:p>
-        </p:txBody>
-      </p:sp>
-    </p:spTree>
-  </p:cSld>
-  <p:clrMapOvr>
-    <a:masterClrMapping/>
-  </p:clrMapOvr>
-</p:sld>
-</file>
-
-<file path=ppt/slides/slide39.xml><?xml version="1.0" encoding="utf-8"?>
 <p:sld xmlns:a="http://schemas.openxmlformats.org/drawingml/2006/main" xmlns:p="http://schemas.openxmlformats.org/presentationml/2006/main" xmlns:r="http://schemas.openxmlformats.org/officeDocument/2006/relationships">
   <p:cSld>
     <p:spTree>
@@ -20452,6 +19587,416 @@
 </p:sld>
 </file>
 
+<file path=ppt/slides/slide39.xml><?xml version="1.0" encoding="utf-8"?>
+<p:sld xmlns:a="http://schemas.openxmlformats.org/drawingml/2006/main" xmlns:p="http://schemas.openxmlformats.org/presentationml/2006/main" xmlns:r="http://schemas.openxmlformats.org/officeDocument/2006/relationships">
+  <p:cSld>
+    <p:spTree>
+      <p:nvGrpSpPr>
+        <p:cNvPr id="1" name=""/>
+        <p:cNvGrpSpPr/>
+        <p:nvPr/>
+      </p:nvGrpSpPr>
+      <p:grpSpPr/>
+      <p:sp>
+        <p:nvSpPr>
+          <p:cNvPr id="2" name="Title 1"/>
+          <p:cNvSpPr>
+            <a:spLocks noGrp="1"/>
+          </p:cNvSpPr>
+          <p:nvPr>
+            <p:ph type="title"/>
+          </p:nvPr>
+        </p:nvSpPr>
+        <p:spPr>
+          <a:xfrm>
+            <a:off x="468172" y="650138"/>
+            <a:ext cx="8206740" cy="616305"/>
+          </a:xfrm>
+        </p:spPr>
+        <p:txBody>
+          <a:bodyPr wrap="square" lIns="0" rIns="0" tIns="0" bIns="0">
+            <a:noAutofit/>
+          </a:bodyPr>
+          <a:lstStyle/>
+          <a:p>
+            <a:pPr algn="l">
+              <a:lnSpc>
+                <a:spcPct val="110000"/>
+              </a:lnSpc>
+              <a:buNone/>
+              <a:defRPr sz="2800" b="0">
+                <a:solidFill>
+                  <a:srgbClr val="303437"/>
+                </a:solidFill>
+                <a:latin typeface="Noto Sans"/>
+              </a:defRPr>
+            </a:pPr>
+            <a:r>
+              <a:rPr sz="2800" b="1" lang="ja-JP" altLang="en-US">
+                <a:solidFill>
+                  <a:srgbClr val="303437"/>
+                </a:solidFill>
+                <a:latin typeface="Noto Sans"/>
+                <a:ea typeface="Noto Sans CJK JP"/>
+                <a:cs typeface="Noto Sans"/>
+              </a:rPr>
+              <a:t>参考文献</a:t>
+            </a:r>
+          </a:p>
+        </p:txBody>
+      </p:sp>
+      <p:sp>
+        <p:nvSpPr>
+          <p:cNvPr id="3" name="Title 2"/>
+          <p:cNvSpPr>
+            <a:spLocks noGrp="1"/>
+          </p:cNvSpPr>
+          <p:nvPr>
+            <p:ph type="title" idx="2"/>
+          </p:nvPr>
+        </p:nvSpPr>
+        <p:spPr>
+          <a:xfrm>
+            <a:off x="75895" y="0"/>
+            <a:ext cx="8115300" cy="480060"/>
+          </a:xfrm>
+        </p:spPr>
+        <p:txBody>
+          <a:bodyPr wrap="square" lIns="0" rIns="0" tIns="0" bIns="0" anchor="ctr">
+            <a:noAutofit/>
+          </a:bodyPr>
+          <a:lstStyle/>
+          <a:p>
+            <a:pPr algn="l">
+              <a:lnSpc>
+                <a:spcPct val="110000"/>
+              </a:lnSpc>
+              <a:buNone/>
+              <a:defRPr sz="1400" b="0">
+                <a:solidFill>
+                  <a:srgbClr val="303437"/>
+                </a:solidFill>
+                <a:latin typeface="Noto Sans"/>
+              </a:defRPr>
+            </a:pPr>
+            <a:r>
+              <a:rPr sz="1400" b="1" lang="ja-JP" altLang="en-US">
+                <a:solidFill>
+                  <a:srgbClr val="FFFEF8"/>
+                </a:solidFill>
+                <a:latin typeface="Noto Sans"/>
+                <a:ea typeface="Noto Sans CJK JP"/>
+                <a:cs typeface="Noto Sans"/>
+              </a:rPr>
+              <a:t>Appendix: 2. 学習方式の比較と参考文献</a:t>
+            </a:r>
+          </a:p>
+        </p:txBody>
+      </p:sp>
+      <p:sp>
+        <p:nvSpPr>
+          <p:cNvPr id="4" name="文献 1: FewCLUE: A Chinese Few-shot Learning Evaluation Benchmark"/>
+          <p:cNvSpPr txBox="1"/>
+          <p:nvPr/>
+        </p:nvSpPr>
+        <p:spPr>
+          <a:xfrm>
+            <a:off x="548640" y="1463040"/>
+            <a:ext cx="8046720" cy="1643688"/>
+          </a:xfrm>
+          <a:prstGeom prst="rect">
+            <a:avLst/>
+          </a:prstGeom>
+          <a:noFill/>
+        </p:spPr>
+        <p:txBody>
+          <a:bodyPr wrap="square" lIns="0" rIns="0" tIns="0" bIns="0">
+            <a:noAutofit/>
+          </a:bodyPr>
+          <a:lstStyle/>
+          <a:p>
+            <a:pPr algn="l">
+              <a:lnSpc>
+                <a:spcPct val="114000"/>
+              </a:lnSpc>
+              <a:spcBef>
+                <a:spcPts val="0"/>
+              </a:spcBef>
+              <a:spcAft>
+                <a:spcPts val="400"/>
+              </a:spcAft>
+              <a:buNone/>
+              <a:defRPr sz="2000" b="0">
+                <a:solidFill>
+                  <a:srgbClr val="303437"/>
+                </a:solidFill>
+                <a:latin typeface="Noto Sans"/>
+              </a:defRPr>
+            </a:pPr>
+            <a:r>
+              <a:rPr sz="2000" b="1" lang="ja-JP" altLang="en-US">
+                <a:solidFill>
+                  <a:srgbClr val="303437"/>
+                </a:solidFill>
+                <a:latin typeface="Noto Sans"/>
+                <a:ea typeface="Noto Sans CJK JP"/>
+                <a:cs typeface="Noto Sans"/>
+              </a:rPr>
+              <a:t>FewCLUE: A Chinese Few-shot Learning Evaluation Benchmark</a:t>
+            </a:r>
+          </a:p>
+          <a:p>
+            <a:pPr algn="l">
+              <a:lnSpc>
+                <a:spcPct val="114000"/>
+              </a:lnSpc>
+              <a:spcBef>
+                <a:spcPts val="0"/>
+              </a:spcBef>
+              <a:spcAft>
+                <a:spcPts val="500"/>
+              </a:spcAft>
+              <a:buNone/>
+              <a:defRPr sz="1350" b="0">
+                <a:solidFill>
+                  <a:srgbClr val="303437"/>
+                </a:solidFill>
+                <a:latin typeface="Noto Sans"/>
+              </a:defRPr>
+            </a:pPr>
+            <a:r>
+              <a:rPr sz="1350" b="0" lang="ja-JP" altLang="en-US">
+                <a:solidFill>
+                  <a:srgbClr val="626669"/>
+                </a:solidFill>
+                <a:latin typeface="Noto Sans"/>
+                <a:ea typeface="Noto Sans CJK JP"/>
+                <a:cs typeface="Noto Sans"/>
+              </a:rPr>
+              <a:t>Liang Xu et al. · 2021 · arXiv preprint</a:t>
+            </a:r>
+          </a:p>
+          <a:p>
+            <a:pPr algn="l">
+              <a:lnSpc>
+                <a:spcPct val="114000"/>
+              </a:lnSpc>
+              <a:spcBef>
+                <a:spcPts val="0"/>
+              </a:spcBef>
+              <a:spcAft>
+                <a:spcPts val="400"/>
+              </a:spcAft>
+              <a:buNone/>
+              <a:defRPr sz="1850" b="0">
+                <a:solidFill>
+                  <a:srgbClr val="303437"/>
+                </a:solidFill>
+                <a:latin typeface="Noto Sans"/>
+              </a:defRPr>
+            </a:pPr>
+            <a:r>
+              <a:rPr sz="1850" b="0" lang="ja-JP" altLang="en-US">
+                <a:solidFill>
+                  <a:srgbClr val="303437"/>
+                </a:solidFill>
+                <a:latin typeface="Noto Sans"/>
+                <a:ea typeface="Noto Sans CJK JP"/>
+                <a:cs typeface="Noto Sans"/>
+              </a:rPr>
+              <a:t>中国語の少数例学習を9課題で比較する研究。EPRSTMTの構成と学習方式別の評価を報告する。</a:t>
+            </a:r>
+          </a:p>
+          <a:p>
+            <a:pPr algn="l">
+              <a:lnSpc>
+                <a:spcPct val="114000"/>
+              </a:lnSpc>
+              <a:spcBef>
+                <a:spcPts val="0"/>
+              </a:spcBef>
+              <a:spcAft>
+                <a:spcPts val="0"/>
+              </a:spcAft>
+              <a:buNone/>
+              <a:defRPr sz="1150" b="0">
+                <a:solidFill>
+                  <a:srgbClr val="303437"/>
+                </a:solidFill>
+                <a:latin typeface="Noto Sans"/>
+              </a:defRPr>
+            </a:pPr>
+            <a:r>
+              <a:rPr sz="1150" b="0" lang="ja-JP" altLang="en-US">
+                <a:solidFill>
+                  <a:srgbClr val="626669"/>
+                </a:solidFill>
+                <a:latin typeface="Noto Sans"/>
+                <a:ea typeface="Noto Sans CJK JP"/>
+                <a:cs typeface="Noto Sans"/>
+                <a:hlinkClick r:id="rId2"/>
+              </a:rPr>
+              <a:t>https://arxiv.org/abs/2107.07498</a:t>
+            </a:r>
+          </a:p>
+        </p:txBody>
+      </p:sp>
+      <p:sp>
+        <p:nvSpPr>
+          <p:cNvPr id="5" name="文献 2: FewCLUE: 小样本学习测评基准，中文版"/>
+          <p:cNvSpPr txBox="1"/>
+          <p:nvPr/>
+        </p:nvSpPr>
+        <p:spPr>
+          <a:xfrm>
+            <a:off x="548640" y="3399536"/>
+            <a:ext cx="8046720" cy="1643637"/>
+          </a:xfrm>
+          <a:prstGeom prst="rect">
+            <a:avLst/>
+          </a:prstGeom>
+          <a:noFill/>
+        </p:spPr>
+        <p:txBody>
+          <a:bodyPr wrap="square" lIns="0" rIns="0" tIns="0" bIns="0">
+            <a:noAutofit/>
+          </a:bodyPr>
+          <a:lstStyle/>
+          <a:p>
+            <a:pPr algn="l">
+              <a:lnSpc>
+                <a:spcPct val="114000"/>
+              </a:lnSpc>
+              <a:spcBef>
+                <a:spcPts val="0"/>
+              </a:spcBef>
+              <a:spcAft>
+                <a:spcPts val="400"/>
+              </a:spcAft>
+              <a:buNone/>
+              <a:defRPr sz="2000" b="0">
+                <a:solidFill>
+                  <a:srgbClr val="303437"/>
+                </a:solidFill>
+                <a:latin typeface="Noto Sans"/>
+              </a:defRPr>
+            </a:pPr>
+            <a:r>
+              <a:rPr sz="2000" b="1" lang="ja-JP" altLang="en-US">
+                <a:solidFill>
+                  <a:srgbClr val="303437"/>
+                </a:solidFill>
+                <a:latin typeface="Noto Sans"/>
+                <a:ea typeface="Noto Sans CJK JP"/>
+                <a:cs typeface="Noto Sans"/>
+              </a:rPr>
+              <a:t>FewCLUE: 小样本学习测评基准，中文版</a:t>
+            </a:r>
+          </a:p>
+          <a:p>
+            <a:pPr algn="l">
+              <a:lnSpc>
+                <a:spcPct val="114000"/>
+              </a:lnSpc>
+              <a:spcBef>
+                <a:spcPts val="0"/>
+              </a:spcBef>
+              <a:spcAft>
+                <a:spcPts val="500"/>
+              </a:spcAft>
+              <a:buNone/>
+              <a:defRPr sz="1350" b="0">
+                <a:solidFill>
+                  <a:srgbClr val="303437"/>
+                </a:solidFill>
+                <a:latin typeface="Noto Sans"/>
+              </a:defRPr>
+            </a:pPr>
+            <a:r>
+              <a:rPr sz="1350" b="0" lang="ja-JP" altLang="en-US">
+                <a:solidFill>
+                  <a:srgbClr val="626669"/>
+                </a:solidFill>
+                <a:latin typeface="Noto Sans"/>
+                <a:ea typeface="Noto Sans CJK JP"/>
+                <a:cs typeface="Noto Sans"/>
+              </a:rPr>
+              <a:t>CLUE team · n.d. · GitHub。参照2026-10-19。</a:t>
+            </a:r>
+          </a:p>
+          <a:p>
+            <a:pPr algn="l">
+              <a:lnSpc>
+                <a:spcPct val="114000"/>
+              </a:lnSpc>
+              <a:spcBef>
+                <a:spcPts val="0"/>
+              </a:spcBef>
+              <a:spcAft>
+                <a:spcPts val="400"/>
+              </a:spcAft>
+              <a:buNone/>
+              <a:defRPr sz="1850" b="0">
+                <a:solidFill>
+                  <a:srgbClr val="303437"/>
+                </a:solidFill>
+                <a:latin typeface="Noto Sans"/>
+              </a:defRPr>
+            </a:pPr>
+            <a:r>
+              <a:rPr sz="1850" b="0" lang="ja-JP" altLang="en-US">
+                <a:solidFill>
+                  <a:srgbClr val="303437"/>
+                </a:solidFill>
+                <a:latin typeface="Noto Sans"/>
+                <a:ea typeface="Noto Sans CJK JP"/>
+                <a:cs typeface="Noto Sans"/>
+              </a:rPr>
+              <a:t>EPRSTMTなどの学習・開発・テスト用データと、少数例学習の実装を公開する。</a:t>
+            </a:r>
+          </a:p>
+          <a:p>
+            <a:pPr algn="l">
+              <a:lnSpc>
+                <a:spcPct val="114000"/>
+              </a:lnSpc>
+              <a:spcBef>
+                <a:spcPts val="0"/>
+              </a:spcBef>
+              <a:spcAft>
+                <a:spcPts val="0"/>
+              </a:spcAft>
+              <a:buNone/>
+              <a:defRPr sz="1150" b="0">
+                <a:solidFill>
+                  <a:srgbClr val="303437"/>
+                </a:solidFill>
+                <a:latin typeface="Noto Sans"/>
+              </a:defRPr>
+            </a:pPr>
+            <a:r>
+              <a:rPr sz="1150" b="0" lang="ja-JP" altLang="en-US">
+                <a:solidFill>
+                  <a:srgbClr val="626669"/>
+                </a:solidFill>
+                <a:latin typeface="Noto Sans"/>
+                <a:ea typeface="Noto Sans CJK JP"/>
+                <a:cs typeface="Noto Sans"/>
+                <a:hlinkClick r:id="rId3"/>
+              </a:rPr>
+              <a:t>https://github.com/CLUEbenchmark/FewCLUE</a:t>
+            </a:r>
+          </a:p>
+        </p:txBody>
+      </p:sp>
+    </p:spTree>
+  </p:cSld>
+  <p:clrMapOvr>
+    <a:masterClrMapping/>
+  </p:clrMapOvr>
+</p:sld>
+</file>
+
 <file path=ppt/slides/slide4.xml><?xml version="1.0" encoding="utf-8"?>
 <p:sld xmlns:a="http://schemas.openxmlformats.org/drawingml/2006/main" xmlns:p="http://schemas.openxmlformats.org/presentationml/2006/main" xmlns:r="http://schemas.openxmlformats.org/officeDocument/2006/relationships">
   <p:cSld>
@@ -20554,826 +20099,6 @@
                 <a:cs typeface="Noto Sans"/>
               </a:rPr>
               <a:t>1. 商品レビューを分類する</a:t>
-            </a:r>
-          </a:p>
-        </p:txBody>
-      </p:sp>
-    </p:spTree>
-  </p:cSld>
-  <p:clrMapOvr>
-    <a:masterClrMapping/>
-  </p:clrMapOvr>
-</p:sld>
-</file>
-
-<file path=ppt/slides/slide40.xml><?xml version="1.0" encoding="utf-8"?>
-<p:sld xmlns:a="http://schemas.openxmlformats.org/drawingml/2006/main" xmlns:p="http://schemas.openxmlformats.org/presentationml/2006/main" xmlns:r="http://schemas.openxmlformats.org/officeDocument/2006/relationships">
-  <p:cSld>
-    <p:spTree>
-      <p:nvGrpSpPr>
-        <p:cNvPr id="1" name=""/>
-        <p:cNvGrpSpPr/>
-        <p:nvPr/>
-      </p:nvGrpSpPr>
-      <p:grpSpPr/>
-      <p:sp>
-        <p:nvSpPr>
-          <p:cNvPr id="2" name="Title 1"/>
-          <p:cNvSpPr>
-            <a:spLocks noGrp="1"/>
-          </p:cNvSpPr>
-          <p:nvPr>
-            <p:ph type="title"/>
-          </p:nvPr>
-        </p:nvSpPr>
-        <p:spPr>
-          <a:xfrm>
-            <a:off x="468172" y="650138"/>
-            <a:ext cx="8206740" cy="616305"/>
-          </a:xfrm>
-        </p:spPr>
-        <p:txBody>
-          <a:bodyPr wrap="square" lIns="0" rIns="0" tIns="0" bIns="0">
-            <a:noAutofit/>
-          </a:bodyPr>
-          <a:lstStyle/>
-          <a:p>
-            <a:pPr algn="l">
-              <a:lnSpc>
-                <a:spcPct val="110000"/>
-              </a:lnSpc>
-              <a:buNone/>
-              <a:defRPr sz="2800" b="0">
-                <a:solidFill>
-                  <a:srgbClr val="303437"/>
-                </a:solidFill>
-                <a:latin typeface="Noto Sans"/>
-              </a:defRPr>
-            </a:pPr>
-            <a:r>
-              <a:rPr sz="2800" b="1" lang="ja-JP" altLang="en-US">
-                <a:solidFill>
-                  <a:srgbClr val="303437"/>
-                </a:solidFill>
-                <a:latin typeface="Noto Sans"/>
-                <a:ea typeface="Noto Sans CJK JP"/>
-                <a:cs typeface="Noto Sans"/>
-              </a:rPr>
-              <a:t>参考文献</a:t>
-            </a:r>
-          </a:p>
-        </p:txBody>
-      </p:sp>
-      <p:sp>
-        <p:nvSpPr>
-          <p:cNvPr id="3" name="Title 2"/>
-          <p:cNvSpPr>
-            <a:spLocks noGrp="1"/>
-          </p:cNvSpPr>
-          <p:nvPr>
-            <p:ph type="title" idx="2"/>
-          </p:nvPr>
-        </p:nvSpPr>
-        <p:spPr>
-          <a:xfrm>
-            <a:off x="75895" y="0"/>
-            <a:ext cx="8115300" cy="480060"/>
-          </a:xfrm>
-        </p:spPr>
-        <p:txBody>
-          <a:bodyPr wrap="square" lIns="0" rIns="0" tIns="0" bIns="0" anchor="ctr">
-            <a:noAutofit/>
-          </a:bodyPr>
-          <a:lstStyle/>
-          <a:p>
-            <a:pPr algn="l">
-              <a:lnSpc>
-                <a:spcPct val="110000"/>
-              </a:lnSpc>
-              <a:buNone/>
-              <a:defRPr sz="1400" b="0">
-                <a:solidFill>
-                  <a:srgbClr val="303437"/>
-                </a:solidFill>
-                <a:latin typeface="Noto Sans"/>
-              </a:defRPr>
-            </a:pPr>
-            <a:r>
-              <a:rPr sz="1400" b="1" lang="ja-JP" altLang="en-US">
-                <a:solidFill>
-                  <a:srgbClr val="FFFEF8"/>
-                </a:solidFill>
-                <a:latin typeface="Noto Sans"/>
-                <a:ea typeface="Noto Sans CJK JP"/>
-                <a:cs typeface="Noto Sans"/>
-              </a:rPr>
-              <a:t>Appendix: 2. 学習方式の比較と参考文献</a:t>
-            </a:r>
-          </a:p>
-        </p:txBody>
-      </p:sp>
-      <p:sp>
-        <p:nvSpPr>
-          <p:cNvPr id="4" name="文献 1: FewCLUE: A Chinese Few-shot Learning Evaluation Benchmark"/>
-          <p:cNvSpPr txBox="1"/>
-          <p:nvPr/>
-        </p:nvSpPr>
-        <p:spPr>
-          <a:xfrm>
-            <a:off x="548640" y="1463040"/>
-            <a:ext cx="8046720" cy="1643688"/>
-          </a:xfrm>
-          <a:prstGeom prst="rect">
-            <a:avLst/>
-          </a:prstGeom>
-          <a:noFill/>
-        </p:spPr>
-        <p:txBody>
-          <a:bodyPr wrap="square" lIns="0" rIns="0" tIns="0" bIns="0">
-            <a:noAutofit/>
-          </a:bodyPr>
-          <a:lstStyle/>
-          <a:p>
-            <a:pPr algn="l">
-              <a:lnSpc>
-                <a:spcPct val="114000"/>
-              </a:lnSpc>
-              <a:spcBef>
-                <a:spcPts val="0"/>
-              </a:spcBef>
-              <a:spcAft>
-                <a:spcPts val="400"/>
-              </a:spcAft>
-              <a:buNone/>
-              <a:defRPr sz="2000" b="0">
-                <a:solidFill>
-                  <a:srgbClr val="303437"/>
-                </a:solidFill>
-                <a:latin typeface="Noto Sans"/>
-              </a:defRPr>
-            </a:pPr>
-            <a:r>
-              <a:rPr sz="2000" b="1" lang="ja-JP" altLang="en-US">
-                <a:solidFill>
-                  <a:srgbClr val="303437"/>
-                </a:solidFill>
-                <a:latin typeface="Noto Sans"/>
-                <a:ea typeface="Noto Sans CJK JP"/>
-                <a:cs typeface="Noto Sans"/>
-              </a:rPr>
-              <a:t>FewCLUE: A Chinese Few-shot Learning Evaluation Benchmark</a:t>
-            </a:r>
-          </a:p>
-          <a:p>
-            <a:pPr algn="l">
-              <a:lnSpc>
-                <a:spcPct val="114000"/>
-              </a:lnSpc>
-              <a:spcBef>
-                <a:spcPts val="0"/>
-              </a:spcBef>
-              <a:spcAft>
-                <a:spcPts val="500"/>
-              </a:spcAft>
-              <a:buNone/>
-              <a:defRPr sz="1350" b="0">
-                <a:solidFill>
-                  <a:srgbClr val="303437"/>
-                </a:solidFill>
-                <a:latin typeface="Noto Sans"/>
-              </a:defRPr>
-            </a:pPr>
-            <a:r>
-              <a:rPr sz="1350" b="0" lang="ja-JP" altLang="en-US">
-                <a:solidFill>
-                  <a:srgbClr val="626669"/>
-                </a:solidFill>
-                <a:latin typeface="Noto Sans"/>
-                <a:ea typeface="Noto Sans CJK JP"/>
-                <a:cs typeface="Noto Sans"/>
-              </a:rPr>
-              <a:t>Liang Xu et al. · 2021 · arXiv preprint</a:t>
-            </a:r>
-          </a:p>
-          <a:p>
-            <a:pPr algn="l">
-              <a:lnSpc>
-                <a:spcPct val="114000"/>
-              </a:lnSpc>
-              <a:spcBef>
-                <a:spcPts val="0"/>
-              </a:spcBef>
-              <a:spcAft>
-                <a:spcPts val="400"/>
-              </a:spcAft>
-              <a:buNone/>
-              <a:defRPr sz="1850" b="0">
-                <a:solidFill>
-                  <a:srgbClr val="303437"/>
-                </a:solidFill>
-                <a:latin typeface="Noto Sans"/>
-              </a:defRPr>
-            </a:pPr>
-            <a:r>
-              <a:rPr sz="1850" b="0" lang="ja-JP" altLang="en-US">
-                <a:solidFill>
-                  <a:srgbClr val="303437"/>
-                </a:solidFill>
-                <a:latin typeface="Noto Sans"/>
-                <a:ea typeface="Noto Sans CJK JP"/>
-                <a:cs typeface="Noto Sans"/>
-              </a:rPr>
-              <a:t>中国語の少数例学習を9課題で比較する研究。EPRSTMTの構成と学習方式別の評価を報告する。</a:t>
-            </a:r>
-          </a:p>
-          <a:p>
-            <a:pPr algn="l">
-              <a:lnSpc>
-                <a:spcPct val="114000"/>
-              </a:lnSpc>
-              <a:spcBef>
-                <a:spcPts val="0"/>
-              </a:spcBef>
-              <a:spcAft>
-                <a:spcPts val="0"/>
-              </a:spcAft>
-              <a:buNone/>
-              <a:defRPr sz="1150" b="0">
-                <a:solidFill>
-                  <a:srgbClr val="303437"/>
-                </a:solidFill>
-                <a:latin typeface="Noto Sans"/>
-              </a:defRPr>
-            </a:pPr>
-            <a:r>
-              <a:rPr sz="1150" b="0" lang="ja-JP" altLang="en-US">
-                <a:solidFill>
-                  <a:srgbClr val="626669"/>
-                </a:solidFill>
-                <a:latin typeface="Noto Sans"/>
-                <a:ea typeface="Noto Sans CJK JP"/>
-                <a:cs typeface="Noto Sans"/>
-                <a:hlinkClick r:id="rId2"/>
-              </a:rPr>
-              <a:t>https://arxiv.org/abs/2107.07498</a:t>
-            </a:r>
-          </a:p>
-        </p:txBody>
-      </p:sp>
-      <p:sp>
-        <p:nvSpPr>
-          <p:cNvPr id="5" name="文献 2: FewCLUE: 小样本学习测评基准，中文版"/>
-          <p:cNvSpPr txBox="1"/>
-          <p:nvPr/>
-        </p:nvSpPr>
-        <p:spPr>
-          <a:xfrm>
-            <a:off x="548640" y="3399536"/>
-            <a:ext cx="8046720" cy="1643637"/>
-          </a:xfrm>
-          <a:prstGeom prst="rect">
-            <a:avLst/>
-          </a:prstGeom>
-          <a:noFill/>
-        </p:spPr>
-        <p:txBody>
-          <a:bodyPr wrap="square" lIns="0" rIns="0" tIns="0" bIns="0">
-            <a:noAutofit/>
-          </a:bodyPr>
-          <a:lstStyle/>
-          <a:p>
-            <a:pPr algn="l">
-              <a:lnSpc>
-                <a:spcPct val="114000"/>
-              </a:lnSpc>
-              <a:spcBef>
-                <a:spcPts val="0"/>
-              </a:spcBef>
-              <a:spcAft>
-                <a:spcPts val="400"/>
-              </a:spcAft>
-              <a:buNone/>
-              <a:defRPr sz="2000" b="0">
-                <a:solidFill>
-                  <a:srgbClr val="303437"/>
-                </a:solidFill>
-                <a:latin typeface="Noto Sans"/>
-              </a:defRPr>
-            </a:pPr>
-            <a:r>
-              <a:rPr sz="2000" b="1" lang="ja-JP" altLang="en-US">
-                <a:solidFill>
-                  <a:srgbClr val="303437"/>
-                </a:solidFill>
-                <a:latin typeface="Noto Sans"/>
-                <a:ea typeface="Noto Sans CJK JP"/>
-                <a:cs typeface="Noto Sans"/>
-              </a:rPr>
-              <a:t>FewCLUE: 小样本学习测评基准，中文版</a:t>
-            </a:r>
-          </a:p>
-          <a:p>
-            <a:pPr algn="l">
-              <a:lnSpc>
-                <a:spcPct val="114000"/>
-              </a:lnSpc>
-              <a:spcBef>
-                <a:spcPts val="0"/>
-              </a:spcBef>
-              <a:spcAft>
-                <a:spcPts val="500"/>
-              </a:spcAft>
-              <a:buNone/>
-              <a:defRPr sz="1350" b="0">
-                <a:solidFill>
-                  <a:srgbClr val="303437"/>
-                </a:solidFill>
-                <a:latin typeface="Noto Sans"/>
-              </a:defRPr>
-            </a:pPr>
-            <a:r>
-              <a:rPr sz="1350" b="0" lang="ja-JP" altLang="en-US">
-                <a:solidFill>
-                  <a:srgbClr val="626669"/>
-                </a:solidFill>
-                <a:latin typeface="Noto Sans"/>
-                <a:ea typeface="Noto Sans CJK JP"/>
-                <a:cs typeface="Noto Sans"/>
-              </a:rPr>
-              <a:t>CLUE team · n.d. · GitHub</a:t>
-            </a:r>
-          </a:p>
-          <a:p>
-            <a:pPr algn="l">
-              <a:lnSpc>
-                <a:spcPct val="114000"/>
-              </a:lnSpc>
-              <a:spcBef>
-                <a:spcPts val="0"/>
-              </a:spcBef>
-              <a:spcAft>
-                <a:spcPts val="400"/>
-              </a:spcAft>
-              <a:buNone/>
-              <a:defRPr sz="1850" b="0">
-                <a:solidFill>
-                  <a:srgbClr val="303437"/>
-                </a:solidFill>
-                <a:latin typeface="Noto Sans"/>
-              </a:defRPr>
-            </a:pPr>
-            <a:r>
-              <a:rPr sz="1850" b="0" lang="ja-JP" altLang="en-US">
-                <a:solidFill>
-                  <a:srgbClr val="303437"/>
-                </a:solidFill>
-                <a:latin typeface="Noto Sans"/>
-                <a:ea typeface="Noto Sans CJK JP"/>
-                <a:cs typeface="Noto Sans"/>
-              </a:rPr>
-              <a:t>EPRSTMTなどの学習・開発・テスト用データと、少数例学習の実装を公開する。</a:t>
-            </a:r>
-          </a:p>
-          <a:p>
-            <a:pPr algn="l">
-              <a:lnSpc>
-                <a:spcPct val="114000"/>
-              </a:lnSpc>
-              <a:spcBef>
-                <a:spcPts val="0"/>
-              </a:spcBef>
-              <a:spcAft>
-                <a:spcPts val="0"/>
-              </a:spcAft>
-              <a:buNone/>
-              <a:defRPr sz="1150" b="0">
-                <a:solidFill>
-                  <a:srgbClr val="303437"/>
-                </a:solidFill>
-                <a:latin typeface="Noto Sans"/>
-              </a:defRPr>
-            </a:pPr>
-            <a:r>
-              <a:rPr sz="1150" b="0" lang="ja-JP" altLang="en-US">
-                <a:solidFill>
-                  <a:srgbClr val="626669"/>
-                </a:solidFill>
-                <a:latin typeface="Noto Sans"/>
-                <a:ea typeface="Noto Sans CJK JP"/>
-                <a:cs typeface="Noto Sans"/>
-                <a:hlinkClick r:id="rId3"/>
-              </a:rPr>
-              <a:t>https://github.com/CLUEbenchmark/FewCLUE</a:t>
-            </a:r>
-          </a:p>
-        </p:txBody>
-      </p:sp>
-    </p:spTree>
-  </p:cSld>
-  <p:clrMapOvr>
-    <a:masterClrMapping/>
-  </p:clrMapOvr>
-</p:sld>
-</file>
-
-<file path=ppt/slides/slide41.xml><?xml version="1.0" encoding="utf-8"?>
-<p:sld xmlns:a="http://schemas.openxmlformats.org/drawingml/2006/main" xmlns:p="http://schemas.openxmlformats.org/presentationml/2006/main" xmlns:r="http://schemas.openxmlformats.org/officeDocument/2006/relationships">
-  <p:cSld>
-    <p:spTree>
-      <p:nvGrpSpPr>
-        <p:cNvPr id="1" name=""/>
-        <p:cNvGrpSpPr/>
-        <p:nvPr/>
-      </p:nvGrpSpPr>
-      <p:grpSpPr/>
-      <p:sp>
-        <p:nvSpPr>
-          <p:cNvPr id="2" name="Title 1"/>
-          <p:cNvSpPr>
-            <a:spLocks noGrp="1"/>
-          </p:cNvSpPr>
-          <p:nvPr>
-            <p:ph type="title"/>
-          </p:nvPr>
-        </p:nvSpPr>
-        <p:spPr>
-          <a:xfrm>
-            <a:off x="468172" y="650138"/>
-            <a:ext cx="8206740" cy="616305"/>
-          </a:xfrm>
-        </p:spPr>
-        <p:txBody>
-          <a:bodyPr wrap="square" lIns="0" rIns="0" tIns="0" bIns="0">
-            <a:noAutofit/>
-          </a:bodyPr>
-          <a:lstStyle/>
-          <a:p>
-            <a:pPr algn="l">
-              <a:lnSpc>
-                <a:spcPct val="110000"/>
-              </a:lnSpc>
-              <a:buNone/>
-              <a:defRPr sz="2800" b="0">
-                <a:solidFill>
-                  <a:srgbClr val="303437"/>
-                </a:solidFill>
-                <a:latin typeface="Noto Sans"/>
-              </a:defRPr>
-            </a:pPr>
-            <a:r>
-              <a:rPr sz="2800" b="1" lang="ja-JP" altLang="en-US">
-                <a:solidFill>
-                  <a:srgbClr val="303437"/>
-                </a:solidFill>
-                <a:latin typeface="Noto Sans"/>
-                <a:ea typeface="Noto Sans CJK JP"/>
-                <a:cs typeface="Noto Sans"/>
-              </a:rPr>
-              <a:t>参考文献</a:t>
-            </a:r>
-          </a:p>
-        </p:txBody>
-      </p:sp>
-      <p:sp>
-        <p:nvSpPr>
-          <p:cNvPr id="3" name="Title 2"/>
-          <p:cNvSpPr>
-            <a:spLocks noGrp="1"/>
-          </p:cNvSpPr>
-          <p:nvPr>
-            <p:ph type="title" idx="2"/>
-          </p:nvPr>
-        </p:nvSpPr>
-        <p:spPr>
-          <a:xfrm>
-            <a:off x="75895" y="0"/>
-            <a:ext cx="8115300" cy="480060"/>
-          </a:xfrm>
-        </p:spPr>
-        <p:txBody>
-          <a:bodyPr wrap="square" lIns="0" rIns="0" tIns="0" bIns="0" anchor="ctr">
-            <a:noAutofit/>
-          </a:bodyPr>
-          <a:lstStyle/>
-          <a:p>
-            <a:pPr algn="l">
-              <a:lnSpc>
-                <a:spcPct val="110000"/>
-              </a:lnSpc>
-              <a:buNone/>
-              <a:defRPr sz="1400" b="0">
-                <a:solidFill>
-                  <a:srgbClr val="303437"/>
-                </a:solidFill>
-                <a:latin typeface="Noto Sans"/>
-              </a:defRPr>
-            </a:pPr>
-            <a:r>
-              <a:rPr sz="1400" b="1" lang="ja-JP" altLang="en-US">
-                <a:solidFill>
-                  <a:srgbClr val="FFFEF8"/>
-                </a:solidFill>
-                <a:latin typeface="Noto Sans"/>
-                <a:ea typeface="Noto Sans CJK JP"/>
-                <a:cs typeface="Noto Sans"/>
-              </a:rPr>
-              <a:t>Appendix: 2. 学習方式の比較と参考文献</a:t>
-            </a:r>
-          </a:p>
-        </p:txBody>
-      </p:sp>
-      <p:sp>
-        <p:nvSpPr>
-          <p:cNvPr id="4" name="文献 1: CLEVA: Chinese Language Models EVAluation Platform"/>
-          <p:cNvSpPr txBox="1"/>
-          <p:nvPr/>
-        </p:nvSpPr>
-        <p:spPr>
-          <a:xfrm>
-            <a:off x="548640" y="1463040"/>
-            <a:ext cx="8046720" cy="1643688"/>
-          </a:xfrm>
-          <a:prstGeom prst="rect">
-            <a:avLst/>
-          </a:prstGeom>
-          <a:noFill/>
-        </p:spPr>
-        <p:txBody>
-          <a:bodyPr wrap="square" lIns="0" rIns="0" tIns="0" bIns="0">
-            <a:noAutofit/>
-          </a:bodyPr>
-          <a:lstStyle/>
-          <a:p>
-            <a:pPr algn="l">
-              <a:lnSpc>
-                <a:spcPct val="114000"/>
-              </a:lnSpc>
-              <a:spcBef>
-                <a:spcPts val="0"/>
-              </a:spcBef>
-              <a:spcAft>
-                <a:spcPts val="400"/>
-              </a:spcAft>
-              <a:buNone/>
-              <a:defRPr sz="2000" b="0">
-                <a:solidFill>
-                  <a:srgbClr val="303437"/>
-                </a:solidFill>
-                <a:latin typeface="Noto Sans"/>
-              </a:defRPr>
-            </a:pPr>
-            <a:r>
-              <a:rPr sz="2000" b="1" lang="ja-JP" altLang="en-US">
-                <a:solidFill>
-                  <a:srgbClr val="303437"/>
-                </a:solidFill>
-                <a:latin typeface="Noto Sans"/>
-                <a:ea typeface="Noto Sans CJK JP"/>
-                <a:cs typeface="Noto Sans"/>
-              </a:rPr>
-              <a:t>CLEVA: Chinese Language Models EVAluation Platform</a:t>
-            </a:r>
-          </a:p>
-          <a:p>
-            <a:pPr algn="l">
-              <a:lnSpc>
-                <a:spcPct val="114000"/>
-              </a:lnSpc>
-              <a:spcBef>
-                <a:spcPts val="0"/>
-              </a:spcBef>
-              <a:spcAft>
-                <a:spcPts val="500"/>
-              </a:spcAft>
-              <a:buNone/>
-              <a:defRPr sz="1350" b="0">
-                <a:solidFill>
-                  <a:srgbClr val="303437"/>
-                </a:solidFill>
-                <a:latin typeface="Noto Sans"/>
-              </a:defRPr>
-            </a:pPr>
-            <a:r>
-              <a:rPr sz="1350" b="0" lang="ja-JP" altLang="en-US">
-                <a:solidFill>
-                  <a:srgbClr val="626669"/>
-                </a:solidFill>
-                <a:latin typeface="Noto Sans"/>
-                <a:ea typeface="Noto Sans CJK JP"/>
-                <a:cs typeface="Noto Sans"/>
-              </a:rPr>
-              <a:t>Li et al. · 2023 · EMNLP System Demonstrations</a:t>
-            </a:r>
-          </a:p>
-          <a:p>
-            <a:pPr algn="l">
-              <a:lnSpc>
-                <a:spcPct val="114000"/>
-              </a:lnSpc>
-              <a:spcBef>
-                <a:spcPts val="0"/>
-              </a:spcBef>
-              <a:spcAft>
-                <a:spcPts val="400"/>
-              </a:spcAft>
-              <a:buNone/>
-              <a:defRPr sz="1850" b="0">
-                <a:solidFill>
-                  <a:srgbClr val="303437"/>
-                </a:solidFill>
-                <a:latin typeface="Noto Sans"/>
-              </a:defRPr>
-            </a:pPr>
-            <a:r>
-              <a:rPr sz="1850" b="0" lang="ja-JP" altLang="en-US">
-                <a:solidFill>
-                  <a:srgbClr val="303437"/>
-                </a:solidFill>
-                <a:latin typeface="Noto Sans"/>
-                <a:ea typeface="Noto Sans CJK JP"/>
-                <a:cs typeface="Noto Sans"/>
-              </a:rPr>
-              <a:t>中国語の言語モデルを広い課題群で評価する枠組み。商品レビューの感情分析にもFewCLUEを利用する。</a:t>
-            </a:r>
-          </a:p>
-          <a:p>
-            <a:pPr algn="l">
-              <a:lnSpc>
-                <a:spcPct val="114000"/>
-              </a:lnSpc>
-              <a:spcBef>
-                <a:spcPts val="0"/>
-              </a:spcBef>
-              <a:spcAft>
-                <a:spcPts val="0"/>
-              </a:spcAft>
-              <a:buNone/>
-              <a:defRPr sz="1150" b="0">
-                <a:solidFill>
-                  <a:srgbClr val="303437"/>
-                </a:solidFill>
-                <a:latin typeface="Noto Sans"/>
-              </a:defRPr>
-            </a:pPr>
-            <a:r>
-              <a:rPr sz="1150" b="0" lang="ja-JP" altLang="en-US">
-                <a:solidFill>
-                  <a:srgbClr val="626669"/>
-                </a:solidFill>
-                <a:latin typeface="Noto Sans"/>
-                <a:ea typeface="Noto Sans CJK JP"/>
-                <a:cs typeface="Noto Sans"/>
-                <a:hlinkClick r:id="rId2"/>
-              </a:rPr>
-              <a:t>https://aclanthology.org/2023.emnlp-demo.17/</a:t>
-            </a:r>
-          </a:p>
-        </p:txBody>
-      </p:sp>
-      <p:sp>
-        <p:nvSpPr>
-          <p:cNvPr id="5" name="文献 2: CLEVASentimentAnalysisScenario"/>
-          <p:cNvSpPr txBox="1"/>
-          <p:nvPr/>
-        </p:nvSpPr>
-        <p:spPr>
-          <a:xfrm>
-            <a:off x="548640" y="3399536"/>
-            <a:ext cx="8046720" cy="1643637"/>
-          </a:xfrm>
-          <a:prstGeom prst="rect">
-            <a:avLst/>
-          </a:prstGeom>
-          <a:noFill/>
-        </p:spPr>
-        <p:txBody>
-          <a:bodyPr wrap="square" lIns="0" rIns="0" tIns="0" bIns="0">
-            <a:noAutofit/>
-          </a:bodyPr>
-          <a:lstStyle/>
-          <a:p>
-            <a:pPr algn="l">
-              <a:lnSpc>
-                <a:spcPct val="114000"/>
-              </a:lnSpc>
-              <a:spcBef>
-                <a:spcPts val="0"/>
-              </a:spcBef>
-              <a:spcAft>
-                <a:spcPts val="400"/>
-              </a:spcAft>
-              <a:buNone/>
-              <a:defRPr sz="2000" b="0">
-                <a:solidFill>
-                  <a:srgbClr val="303437"/>
-                </a:solidFill>
-                <a:latin typeface="Noto Sans"/>
-              </a:defRPr>
-            </a:pPr>
-            <a:r>
-              <a:rPr sz="2000" b="1" lang="ja-JP" altLang="en-US">
-                <a:solidFill>
-                  <a:srgbClr val="303437"/>
-                </a:solidFill>
-                <a:latin typeface="Noto Sans"/>
-                <a:ea typeface="Noto Sans CJK JP"/>
-                <a:cs typeface="Noto Sans"/>
-              </a:rPr>
-              <a:t>CLEVASentimentAnalysisScenario</a:t>
-            </a:r>
-          </a:p>
-          <a:p>
-            <a:pPr algn="l">
-              <a:lnSpc>
-                <a:spcPct val="114000"/>
-              </a:lnSpc>
-              <a:spcBef>
-                <a:spcPts val="0"/>
-              </a:spcBef>
-              <a:spcAft>
-                <a:spcPts val="500"/>
-              </a:spcAft>
-              <a:buNone/>
-              <a:defRPr sz="1350" b="0">
-                <a:solidFill>
-                  <a:srgbClr val="303437"/>
-                </a:solidFill>
-                <a:latin typeface="Noto Sans"/>
-              </a:defRPr>
-            </a:pPr>
-            <a:r>
-              <a:rPr sz="1350" b="0" lang="ja-JP" altLang="en-US">
-                <a:solidFill>
-                  <a:srgbClr val="626669"/>
-                </a:solidFill>
-                <a:latin typeface="Noto Sans"/>
-                <a:ea typeface="Noto Sans CJK JP"/>
-                <a:cs typeface="Noto Sans"/>
-              </a:rPr>
-              <a:t>Stanford CRFM · n.d. · HELM</a:t>
-            </a:r>
-          </a:p>
-          <a:p>
-            <a:pPr algn="l">
-              <a:lnSpc>
-                <a:spcPct val="114000"/>
-              </a:lnSpc>
-              <a:spcBef>
-                <a:spcPts val="0"/>
-              </a:spcBef>
-              <a:spcAft>
-                <a:spcPts val="400"/>
-              </a:spcAft>
-              <a:buNone/>
-              <a:defRPr sz="1850" b="0">
-                <a:solidFill>
-                  <a:srgbClr val="303437"/>
-                </a:solidFill>
-                <a:latin typeface="Noto Sans"/>
-              </a:defRPr>
-            </a:pPr>
-            <a:r>
-              <a:rPr sz="1850" b="0" lang="ja-JP" altLang="en-US">
-                <a:solidFill>
-                  <a:srgbClr val="303437"/>
-                </a:solidFill>
-                <a:latin typeface="Noto Sans"/>
-                <a:ea typeface="Noto Sans CJK JP"/>
-                <a:cs typeface="Noto Sans"/>
-              </a:rPr>
-              <a:t>商品レビューに肯定的・否定的の選択肢を付けた設問例を示す、感情分析課題の実装。</a:t>
-            </a:r>
-          </a:p>
-          <a:p>
-            <a:pPr algn="l">
-              <a:lnSpc>
-                <a:spcPct val="114000"/>
-              </a:lnSpc>
-              <a:spcBef>
-                <a:spcPts val="0"/>
-              </a:spcBef>
-              <a:spcAft>
-                <a:spcPts val="0"/>
-              </a:spcAft>
-              <a:buNone/>
-              <a:defRPr sz="1150" b="0">
-                <a:solidFill>
-                  <a:srgbClr val="303437"/>
-                </a:solidFill>
-                <a:latin typeface="Noto Sans"/>
-              </a:defRPr>
-            </a:pPr>
-            <a:r>
-              <a:rPr sz="1150" b="0" lang="ja-JP" altLang="en-US">
-                <a:solidFill>
-                  <a:srgbClr val="626669"/>
-                </a:solidFill>
-                <a:latin typeface="Noto Sans"/>
-                <a:ea typeface="Noto Sans CJK JP"/>
-                <a:cs typeface="Noto Sans"/>
-                <a:hlinkClick r:id="rId3"/>
-              </a:rPr>
-              <a:t>https://github.com/stanford-crfm/helm/blob/v0.4.0/src/helm/benchmark/scenarios/cleva_scenario.py</a:t>
             </a:r>
           </a:p>
         </p:txBody>
